--- a/HCWMPA&S/Slides/8. Epilogue.pptx
+++ b/HCWMPA&S/Slides/8. Epilogue.pptx
@@ -220,7 +220,7 @@
 <file path=ppt/revisionInfo.xml><?xml version="1.0" encoding="utf-8"?>
 <p1510:revInfo xmlns:a="http://schemas.openxmlformats.org/drawingml/2006/main" xmlns:r="http://schemas.openxmlformats.org/officeDocument/2006/relationships" xmlns:p1510="http://schemas.microsoft.com/office/powerpoint/2015/10/main">
   <p1510:revLst>
-    <p1510:client id="{24414D35-63EA-49AB-B02A-5978EF51928F}" v="13955" dt="2026-10-26T12:13:30.811"/>
+    <p1510:client id="{24414D35-63EA-49AB-B02A-5978EF51928F}" v="14154" dt="2026-10-30T23:17:28.524"/>
   </p1510:revLst>
 </p1510:revInfo>
 </file>
@@ -230,7 +230,7 @@
   <pc:docChgLst>
     <pc:chgData name="Li, Cong" userId="025630f4-267e-4cb3-8cd5-8795177f99f4" providerId="ADAL" clId="{929A2CC8-B112-421C-81E2-D5D63B23E300}"/>
     <pc:docChg chg="undo redo custSel addSld delSld modSld sldOrd">
-      <pc:chgData name="Li, Cong" userId="025630f4-267e-4cb3-8cd5-8795177f99f4" providerId="ADAL" clId="{929A2CC8-B112-421C-81E2-D5D63B23E300}" dt="2026-10-26T12:22:32.045" v="97556" actId="1036"/>
+      <pc:chgData name="Li, Cong" userId="025630f4-267e-4cb3-8cd5-8795177f99f4" providerId="ADAL" clId="{929A2CC8-B112-421C-81E2-D5D63B23E300}" dt="2026-10-30T23:17:43.546" v="97763" actId="1035"/>
       <pc:docMkLst>
         <pc:docMk/>
       </pc:docMkLst>
@@ -256,41 +256,6 @@
             <ac:spMk id="5122" creationId="{00000000-0000-0000-0000-000000000000}"/>
           </ac:spMkLst>
         </pc:spChg>
-      </pc:sldChg>
-      <pc:sldChg chg="modSp add del mod">
-        <pc:chgData name="Li, Cong" userId="025630f4-267e-4cb3-8cd5-8795177f99f4" providerId="ADAL" clId="{929A2CC8-B112-421C-81E2-D5D63B23E300}" dt="2026-10-25T02:47:55.905" v="83660" actId="47"/>
-        <pc:sldMkLst>
-          <pc:docMk/>
-          <pc:sldMk cId="440668768" sldId="496"/>
-        </pc:sldMkLst>
-      </pc:sldChg>
-      <pc:sldChg chg="modSp add del mod">
-        <pc:chgData name="Li, Cong" userId="025630f4-267e-4cb3-8cd5-8795177f99f4" providerId="ADAL" clId="{929A2CC8-B112-421C-81E2-D5D63B23E300}" dt="2026-10-25T02:47:55.905" v="83660" actId="47"/>
-        <pc:sldMkLst>
-          <pc:docMk/>
-          <pc:sldMk cId="2625912440" sldId="522"/>
-        </pc:sldMkLst>
-      </pc:sldChg>
-      <pc:sldChg chg="addSp delSp modSp add del mod delAnim modAnim">
-        <pc:chgData name="Li, Cong" userId="025630f4-267e-4cb3-8cd5-8795177f99f4" providerId="ADAL" clId="{929A2CC8-B112-421C-81E2-D5D63B23E300}" dt="2026-10-25T02:47:55.905" v="83660" actId="47"/>
-        <pc:sldMkLst>
-          <pc:docMk/>
-          <pc:sldMk cId="2438670737" sldId="599"/>
-        </pc:sldMkLst>
-      </pc:sldChg>
-      <pc:sldChg chg="addSp delSp modSp add del mod">
-        <pc:chgData name="Li, Cong" userId="025630f4-267e-4cb3-8cd5-8795177f99f4" providerId="ADAL" clId="{929A2CC8-B112-421C-81E2-D5D63B23E300}" dt="2026-10-25T02:47:55.905" v="83660" actId="47"/>
-        <pc:sldMkLst>
-          <pc:docMk/>
-          <pc:sldMk cId="1009159685" sldId="629"/>
-        </pc:sldMkLst>
-      </pc:sldChg>
-      <pc:sldChg chg="addSp delSp modSp add del mod delAnim modAnim">
-        <pc:chgData name="Li, Cong" userId="025630f4-267e-4cb3-8cd5-8795177f99f4" providerId="ADAL" clId="{929A2CC8-B112-421C-81E2-D5D63B23E300}" dt="2026-10-25T02:47:55.905" v="83660" actId="47"/>
-        <pc:sldMkLst>
-          <pc:docMk/>
-          <pc:sldMk cId="2607327523" sldId="644"/>
-        </pc:sldMkLst>
       </pc:sldChg>
       <pc:sldChg chg="addSp delSp modSp add mod ord delAnim modAnim">
         <pc:chgData name="Li, Cong" userId="025630f4-267e-4cb3-8cd5-8795177f99f4" providerId="ADAL" clId="{929A2CC8-B112-421C-81E2-D5D63B23E300}" dt="2026-10-25T01:32:52.782" v="80159"/>
@@ -338,314 +303,6 @@
             <ac:spMk id="10" creationId="{8CA2D213-5363-199C-E11A-691EE19F49D8}"/>
           </ac:spMkLst>
         </pc:spChg>
-      </pc:sldChg>
-      <pc:sldChg chg="addSp delSp modSp add del mod delAnim">
-        <pc:chgData name="Li, Cong" userId="025630f4-267e-4cb3-8cd5-8795177f99f4" providerId="ADAL" clId="{929A2CC8-B112-421C-81E2-D5D63B23E300}" dt="2026-10-25T02:47:55.905" v="83660" actId="47"/>
-        <pc:sldMkLst>
-          <pc:docMk/>
-          <pc:sldMk cId="1535622073" sldId="646"/>
-        </pc:sldMkLst>
-      </pc:sldChg>
-      <pc:sldChg chg="modSp add del mod modAnim">
-        <pc:chgData name="Li, Cong" userId="025630f4-267e-4cb3-8cd5-8795177f99f4" providerId="ADAL" clId="{929A2CC8-B112-421C-81E2-D5D63B23E300}" dt="2026-10-25T02:47:55.905" v="83660" actId="47"/>
-        <pc:sldMkLst>
-          <pc:docMk/>
-          <pc:sldMk cId="337592539" sldId="648"/>
-        </pc:sldMkLst>
-      </pc:sldChg>
-      <pc:sldChg chg="modSp add del mod modAnim">
-        <pc:chgData name="Li, Cong" userId="025630f4-267e-4cb3-8cd5-8795177f99f4" providerId="ADAL" clId="{929A2CC8-B112-421C-81E2-D5D63B23E300}" dt="2026-10-25T02:47:55.905" v="83660" actId="47"/>
-        <pc:sldMkLst>
-          <pc:docMk/>
-          <pc:sldMk cId="4021112979" sldId="649"/>
-        </pc:sldMkLst>
-      </pc:sldChg>
-      <pc:sldChg chg="modSp add del mod">
-        <pc:chgData name="Li, Cong" userId="025630f4-267e-4cb3-8cd5-8795177f99f4" providerId="ADAL" clId="{929A2CC8-B112-421C-81E2-D5D63B23E300}" dt="2026-10-25T02:47:55.905" v="83660" actId="47"/>
-        <pc:sldMkLst>
-          <pc:docMk/>
-          <pc:sldMk cId="944223250" sldId="650"/>
-        </pc:sldMkLst>
-      </pc:sldChg>
-      <pc:sldChg chg="modSp add del mod">
-        <pc:chgData name="Li, Cong" userId="025630f4-267e-4cb3-8cd5-8795177f99f4" providerId="ADAL" clId="{929A2CC8-B112-421C-81E2-D5D63B23E300}" dt="2026-10-25T02:47:55.905" v="83660" actId="47"/>
-        <pc:sldMkLst>
-          <pc:docMk/>
-          <pc:sldMk cId="1952582907" sldId="651"/>
-        </pc:sldMkLst>
-      </pc:sldChg>
-      <pc:sldChg chg="modSp add del mod modAnim">
-        <pc:chgData name="Li, Cong" userId="025630f4-267e-4cb3-8cd5-8795177f99f4" providerId="ADAL" clId="{929A2CC8-B112-421C-81E2-D5D63B23E300}" dt="2026-10-25T02:47:55.905" v="83660" actId="47"/>
-        <pc:sldMkLst>
-          <pc:docMk/>
-          <pc:sldMk cId="1924237332" sldId="652"/>
-        </pc:sldMkLst>
-      </pc:sldChg>
-      <pc:sldChg chg="addSp delSp modSp add del mod modAnim">
-        <pc:chgData name="Li, Cong" userId="025630f4-267e-4cb3-8cd5-8795177f99f4" providerId="ADAL" clId="{929A2CC8-B112-421C-81E2-D5D63B23E300}" dt="2026-10-25T02:47:55.905" v="83660" actId="47"/>
-        <pc:sldMkLst>
-          <pc:docMk/>
-          <pc:sldMk cId="515799809" sldId="653"/>
-        </pc:sldMkLst>
-      </pc:sldChg>
-      <pc:sldChg chg="addSp modSp add del mod modAnim">
-        <pc:chgData name="Li, Cong" userId="025630f4-267e-4cb3-8cd5-8795177f99f4" providerId="ADAL" clId="{929A2CC8-B112-421C-81E2-D5D63B23E300}" dt="2026-10-25T02:47:55.905" v="83660" actId="47"/>
-        <pc:sldMkLst>
-          <pc:docMk/>
-          <pc:sldMk cId="3102104761" sldId="654"/>
-        </pc:sldMkLst>
-      </pc:sldChg>
-      <pc:sldChg chg="addSp delSp modSp add del mod">
-        <pc:chgData name="Li, Cong" userId="025630f4-267e-4cb3-8cd5-8795177f99f4" providerId="ADAL" clId="{929A2CC8-B112-421C-81E2-D5D63B23E300}" dt="2026-10-25T02:47:55.905" v="83660" actId="47"/>
-        <pc:sldMkLst>
-          <pc:docMk/>
-          <pc:sldMk cId="1361454139" sldId="655"/>
-        </pc:sldMkLst>
-      </pc:sldChg>
-      <pc:sldChg chg="addSp delSp modSp add del mod">
-        <pc:chgData name="Li, Cong" userId="025630f4-267e-4cb3-8cd5-8795177f99f4" providerId="ADAL" clId="{929A2CC8-B112-421C-81E2-D5D63B23E300}" dt="2026-10-25T02:47:55.905" v="83660" actId="47"/>
-        <pc:sldMkLst>
-          <pc:docMk/>
-          <pc:sldMk cId="27341985" sldId="656"/>
-        </pc:sldMkLst>
-      </pc:sldChg>
-      <pc:sldChg chg="addSp modSp add del mod">
-        <pc:chgData name="Li, Cong" userId="025630f4-267e-4cb3-8cd5-8795177f99f4" providerId="ADAL" clId="{929A2CC8-B112-421C-81E2-D5D63B23E300}" dt="2026-10-25T02:47:55.905" v="83660" actId="47"/>
-        <pc:sldMkLst>
-          <pc:docMk/>
-          <pc:sldMk cId="1137350092" sldId="657"/>
-        </pc:sldMkLst>
-      </pc:sldChg>
-      <pc:sldChg chg="addSp delSp modSp add del mod delAnim modAnim">
-        <pc:chgData name="Li, Cong" userId="025630f4-267e-4cb3-8cd5-8795177f99f4" providerId="ADAL" clId="{929A2CC8-B112-421C-81E2-D5D63B23E300}" dt="2026-10-25T02:47:55.905" v="83660" actId="47"/>
-        <pc:sldMkLst>
-          <pc:docMk/>
-          <pc:sldMk cId="2935658337" sldId="658"/>
-        </pc:sldMkLst>
-      </pc:sldChg>
-      <pc:sldChg chg="modSp add del mod">
-        <pc:chgData name="Li, Cong" userId="025630f4-267e-4cb3-8cd5-8795177f99f4" providerId="ADAL" clId="{929A2CC8-B112-421C-81E2-D5D63B23E300}" dt="2026-10-25T02:47:55.905" v="83660" actId="47"/>
-        <pc:sldMkLst>
-          <pc:docMk/>
-          <pc:sldMk cId="3818523678" sldId="659"/>
-        </pc:sldMkLst>
-      </pc:sldChg>
-      <pc:sldChg chg="modSp add del mod modAnim">
-        <pc:chgData name="Li, Cong" userId="025630f4-267e-4cb3-8cd5-8795177f99f4" providerId="ADAL" clId="{929A2CC8-B112-421C-81E2-D5D63B23E300}" dt="2026-10-25T02:47:55.905" v="83660" actId="47"/>
-        <pc:sldMkLst>
-          <pc:docMk/>
-          <pc:sldMk cId="51596517" sldId="660"/>
-        </pc:sldMkLst>
-      </pc:sldChg>
-      <pc:sldChg chg="modSp add del mod modAnim">
-        <pc:chgData name="Li, Cong" userId="025630f4-267e-4cb3-8cd5-8795177f99f4" providerId="ADAL" clId="{929A2CC8-B112-421C-81E2-D5D63B23E300}" dt="2026-10-25T02:47:55.905" v="83660" actId="47"/>
-        <pc:sldMkLst>
-          <pc:docMk/>
-          <pc:sldMk cId="379162673" sldId="661"/>
-        </pc:sldMkLst>
-      </pc:sldChg>
-      <pc:sldChg chg="modSp add del mod modAnim">
-        <pc:chgData name="Li, Cong" userId="025630f4-267e-4cb3-8cd5-8795177f99f4" providerId="ADAL" clId="{929A2CC8-B112-421C-81E2-D5D63B23E300}" dt="2026-10-25T02:47:55.905" v="83660" actId="47"/>
-        <pc:sldMkLst>
-          <pc:docMk/>
-          <pc:sldMk cId="1471535493" sldId="663"/>
-        </pc:sldMkLst>
-      </pc:sldChg>
-      <pc:sldChg chg="modSp add del mod modAnim">
-        <pc:chgData name="Li, Cong" userId="025630f4-267e-4cb3-8cd5-8795177f99f4" providerId="ADAL" clId="{929A2CC8-B112-421C-81E2-D5D63B23E300}" dt="2026-10-25T02:47:55.905" v="83660" actId="47"/>
-        <pc:sldMkLst>
-          <pc:docMk/>
-          <pc:sldMk cId="2752727051" sldId="664"/>
-        </pc:sldMkLst>
-      </pc:sldChg>
-      <pc:sldChg chg="modSp add del mod modAnim">
-        <pc:chgData name="Li, Cong" userId="025630f4-267e-4cb3-8cd5-8795177f99f4" providerId="ADAL" clId="{929A2CC8-B112-421C-81E2-D5D63B23E300}" dt="2026-10-25T02:47:55.905" v="83660" actId="47"/>
-        <pc:sldMkLst>
-          <pc:docMk/>
-          <pc:sldMk cId="4279942667" sldId="665"/>
-        </pc:sldMkLst>
-      </pc:sldChg>
-      <pc:sldChg chg="addSp delSp modSp add del mod delAnim modAnim">
-        <pc:chgData name="Li, Cong" userId="025630f4-267e-4cb3-8cd5-8795177f99f4" providerId="ADAL" clId="{929A2CC8-B112-421C-81E2-D5D63B23E300}" dt="2026-10-25T02:47:55.905" v="83660" actId="47"/>
-        <pc:sldMkLst>
-          <pc:docMk/>
-          <pc:sldMk cId="2767785173" sldId="666"/>
-        </pc:sldMkLst>
-      </pc:sldChg>
-      <pc:sldChg chg="addSp delSp modSp add del mod modAnim">
-        <pc:chgData name="Li, Cong" userId="025630f4-267e-4cb3-8cd5-8795177f99f4" providerId="ADAL" clId="{929A2CC8-B112-421C-81E2-D5D63B23E300}" dt="2026-10-25T02:47:55.905" v="83660" actId="47"/>
-        <pc:sldMkLst>
-          <pc:docMk/>
-          <pc:sldMk cId="1208049748" sldId="667"/>
-        </pc:sldMkLst>
-      </pc:sldChg>
-      <pc:sldChg chg="addSp delSp modSp add del mod delAnim modAnim">
-        <pc:chgData name="Li, Cong" userId="025630f4-267e-4cb3-8cd5-8795177f99f4" providerId="ADAL" clId="{929A2CC8-B112-421C-81E2-D5D63B23E300}" dt="2026-10-25T02:47:55.905" v="83660" actId="47"/>
-        <pc:sldMkLst>
-          <pc:docMk/>
-          <pc:sldMk cId="4078939705" sldId="668"/>
-        </pc:sldMkLst>
-      </pc:sldChg>
-      <pc:sldChg chg="addSp delSp modSp add del mod delAnim modAnim">
-        <pc:chgData name="Li, Cong" userId="025630f4-267e-4cb3-8cd5-8795177f99f4" providerId="ADAL" clId="{929A2CC8-B112-421C-81E2-D5D63B23E300}" dt="2026-10-25T02:47:55.905" v="83660" actId="47"/>
-        <pc:sldMkLst>
-          <pc:docMk/>
-          <pc:sldMk cId="1417012964" sldId="669"/>
-        </pc:sldMkLst>
-      </pc:sldChg>
-      <pc:sldChg chg="addSp delSp modSp add del mod delAnim modAnim">
-        <pc:chgData name="Li, Cong" userId="025630f4-267e-4cb3-8cd5-8795177f99f4" providerId="ADAL" clId="{929A2CC8-B112-421C-81E2-D5D63B23E300}" dt="2026-10-25T02:47:55.905" v="83660" actId="47"/>
-        <pc:sldMkLst>
-          <pc:docMk/>
-          <pc:sldMk cId="3097563623" sldId="670"/>
-        </pc:sldMkLst>
-      </pc:sldChg>
-      <pc:sldChg chg="addSp delSp modSp add del mod modAnim">
-        <pc:chgData name="Li, Cong" userId="025630f4-267e-4cb3-8cd5-8795177f99f4" providerId="ADAL" clId="{929A2CC8-B112-421C-81E2-D5D63B23E300}" dt="2026-10-25T02:47:55.905" v="83660" actId="47"/>
-        <pc:sldMkLst>
-          <pc:docMk/>
-          <pc:sldMk cId="2786018410" sldId="671"/>
-        </pc:sldMkLst>
-      </pc:sldChg>
-      <pc:sldChg chg="addSp delSp modSp add del mod modAnim">
-        <pc:chgData name="Li, Cong" userId="025630f4-267e-4cb3-8cd5-8795177f99f4" providerId="ADAL" clId="{929A2CC8-B112-421C-81E2-D5D63B23E300}" dt="2026-10-25T02:47:55.905" v="83660" actId="47"/>
-        <pc:sldMkLst>
-          <pc:docMk/>
-          <pc:sldMk cId="3467815374" sldId="672"/>
-        </pc:sldMkLst>
-      </pc:sldChg>
-      <pc:sldChg chg="addSp delSp modSp add del mod modAnim">
-        <pc:chgData name="Li, Cong" userId="025630f4-267e-4cb3-8cd5-8795177f99f4" providerId="ADAL" clId="{929A2CC8-B112-421C-81E2-D5D63B23E300}" dt="2026-10-25T02:47:55.905" v="83660" actId="47"/>
-        <pc:sldMkLst>
-          <pc:docMk/>
-          <pc:sldMk cId="1418775150" sldId="673"/>
-        </pc:sldMkLst>
-      </pc:sldChg>
-      <pc:sldChg chg="modSp add del mod">
-        <pc:chgData name="Li, Cong" userId="025630f4-267e-4cb3-8cd5-8795177f99f4" providerId="ADAL" clId="{929A2CC8-B112-421C-81E2-D5D63B23E300}" dt="2026-10-25T02:47:55.905" v="83660" actId="47"/>
-        <pc:sldMkLst>
-          <pc:docMk/>
-          <pc:sldMk cId="3300590521" sldId="674"/>
-        </pc:sldMkLst>
-      </pc:sldChg>
-      <pc:sldChg chg="modSp add del mod">
-        <pc:chgData name="Li, Cong" userId="025630f4-267e-4cb3-8cd5-8795177f99f4" providerId="ADAL" clId="{929A2CC8-B112-421C-81E2-D5D63B23E300}" dt="2026-10-25T02:47:55.905" v="83660" actId="47"/>
-        <pc:sldMkLst>
-          <pc:docMk/>
-          <pc:sldMk cId="1259981469" sldId="675"/>
-        </pc:sldMkLst>
-      </pc:sldChg>
-      <pc:sldChg chg="modSp add del mod">
-        <pc:chgData name="Li, Cong" userId="025630f4-267e-4cb3-8cd5-8795177f99f4" providerId="ADAL" clId="{929A2CC8-B112-421C-81E2-D5D63B23E300}" dt="2026-10-25T02:47:55.905" v="83660" actId="47"/>
-        <pc:sldMkLst>
-          <pc:docMk/>
-          <pc:sldMk cId="492437470" sldId="676"/>
-        </pc:sldMkLst>
-      </pc:sldChg>
-      <pc:sldChg chg="addSp delSp modSp add del mod setBg delAnim modAnim">
-        <pc:chgData name="Li, Cong" userId="025630f4-267e-4cb3-8cd5-8795177f99f4" providerId="ADAL" clId="{929A2CC8-B112-421C-81E2-D5D63B23E300}" dt="2026-10-25T02:47:55.905" v="83660" actId="47"/>
-        <pc:sldMkLst>
-          <pc:docMk/>
-          <pc:sldMk cId="172383689" sldId="677"/>
-        </pc:sldMkLst>
-      </pc:sldChg>
-      <pc:sldChg chg="addSp delSp modSp add del mod setBg modAnim">
-        <pc:chgData name="Li, Cong" userId="025630f4-267e-4cb3-8cd5-8795177f99f4" providerId="ADAL" clId="{929A2CC8-B112-421C-81E2-D5D63B23E300}" dt="2026-10-25T02:47:55.905" v="83660" actId="47"/>
-        <pc:sldMkLst>
-          <pc:docMk/>
-          <pc:sldMk cId="3869334679" sldId="678"/>
-        </pc:sldMkLst>
-      </pc:sldChg>
-      <pc:sldChg chg="delSp modSp add del mod modAnim">
-        <pc:chgData name="Li, Cong" userId="025630f4-267e-4cb3-8cd5-8795177f99f4" providerId="ADAL" clId="{929A2CC8-B112-421C-81E2-D5D63B23E300}" dt="2026-10-25T02:47:55.905" v="83660" actId="47"/>
-        <pc:sldMkLst>
-          <pc:docMk/>
-          <pc:sldMk cId="2956421229" sldId="679"/>
-        </pc:sldMkLst>
-      </pc:sldChg>
-      <pc:sldChg chg="addSp delSp modSp add del mod delAnim modAnim">
-        <pc:chgData name="Li, Cong" userId="025630f4-267e-4cb3-8cd5-8795177f99f4" providerId="ADAL" clId="{929A2CC8-B112-421C-81E2-D5D63B23E300}" dt="2026-10-25T02:47:55.905" v="83660" actId="47"/>
-        <pc:sldMkLst>
-          <pc:docMk/>
-          <pc:sldMk cId="3685720987" sldId="680"/>
-        </pc:sldMkLst>
-      </pc:sldChg>
-      <pc:sldChg chg="addSp delSp modSp add del mod delAnim modAnim">
-        <pc:chgData name="Li, Cong" userId="025630f4-267e-4cb3-8cd5-8795177f99f4" providerId="ADAL" clId="{929A2CC8-B112-421C-81E2-D5D63B23E300}" dt="2026-10-25T02:47:55.905" v="83660" actId="47"/>
-        <pc:sldMkLst>
-          <pc:docMk/>
-          <pc:sldMk cId="1712827502" sldId="681"/>
-        </pc:sldMkLst>
-      </pc:sldChg>
-      <pc:sldChg chg="addSp delSp modSp add del mod delAnim modAnim">
-        <pc:chgData name="Li, Cong" userId="025630f4-267e-4cb3-8cd5-8795177f99f4" providerId="ADAL" clId="{929A2CC8-B112-421C-81E2-D5D63B23E300}" dt="2026-10-25T02:47:55.905" v="83660" actId="47"/>
-        <pc:sldMkLst>
-          <pc:docMk/>
-          <pc:sldMk cId="2854482502" sldId="682"/>
-        </pc:sldMkLst>
-      </pc:sldChg>
-      <pc:sldChg chg="delSp modSp add del mod modAnim">
-        <pc:chgData name="Li, Cong" userId="025630f4-267e-4cb3-8cd5-8795177f99f4" providerId="ADAL" clId="{929A2CC8-B112-421C-81E2-D5D63B23E300}" dt="2026-10-25T02:47:55.905" v="83660" actId="47"/>
-        <pc:sldMkLst>
-          <pc:docMk/>
-          <pc:sldMk cId="2772184463" sldId="683"/>
-        </pc:sldMkLst>
-      </pc:sldChg>
-      <pc:sldChg chg="modSp add del mod modAnim">
-        <pc:chgData name="Li, Cong" userId="025630f4-267e-4cb3-8cd5-8795177f99f4" providerId="ADAL" clId="{929A2CC8-B112-421C-81E2-D5D63B23E300}" dt="2026-10-25T02:47:55.905" v="83660" actId="47"/>
-        <pc:sldMkLst>
-          <pc:docMk/>
-          <pc:sldMk cId="3467838845" sldId="684"/>
-        </pc:sldMkLst>
-      </pc:sldChg>
-      <pc:sldChg chg="addSp delSp modSp add del mod modAnim">
-        <pc:chgData name="Li, Cong" userId="025630f4-267e-4cb3-8cd5-8795177f99f4" providerId="ADAL" clId="{929A2CC8-B112-421C-81E2-D5D63B23E300}" dt="2026-10-25T02:47:55.905" v="83660" actId="47"/>
-        <pc:sldMkLst>
-          <pc:docMk/>
-          <pc:sldMk cId="1308115475" sldId="685"/>
-        </pc:sldMkLst>
-      </pc:sldChg>
-      <pc:sldChg chg="addSp delSp modSp add del mod delAnim modAnim">
-        <pc:chgData name="Li, Cong" userId="025630f4-267e-4cb3-8cd5-8795177f99f4" providerId="ADAL" clId="{929A2CC8-B112-421C-81E2-D5D63B23E300}" dt="2026-10-25T02:47:55.905" v="83660" actId="47"/>
-        <pc:sldMkLst>
-          <pc:docMk/>
-          <pc:sldMk cId="221958194" sldId="686"/>
-        </pc:sldMkLst>
-      </pc:sldChg>
-      <pc:sldChg chg="addSp modSp add del mod modAnim">
-        <pc:chgData name="Li, Cong" userId="025630f4-267e-4cb3-8cd5-8795177f99f4" providerId="ADAL" clId="{929A2CC8-B112-421C-81E2-D5D63B23E300}" dt="2026-10-25T02:47:55.905" v="83660" actId="47"/>
-        <pc:sldMkLst>
-          <pc:docMk/>
-          <pc:sldMk cId="2278926780" sldId="687"/>
-        </pc:sldMkLst>
-      </pc:sldChg>
-      <pc:sldChg chg="modSp add del mod modAnim">
-        <pc:chgData name="Li, Cong" userId="025630f4-267e-4cb3-8cd5-8795177f99f4" providerId="ADAL" clId="{929A2CC8-B112-421C-81E2-D5D63B23E300}" dt="2026-10-25T02:47:55.905" v="83660" actId="47"/>
-        <pc:sldMkLst>
-          <pc:docMk/>
-          <pc:sldMk cId="2927516807" sldId="688"/>
-        </pc:sldMkLst>
-      </pc:sldChg>
-      <pc:sldChg chg="modSp add del mod modAnim">
-        <pc:chgData name="Li, Cong" userId="025630f4-267e-4cb3-8cd5-8795177f99f4" providerId="ADAL" clId="{929A2CC8-B112-421C-81E2-D5D63B23E300}" dt="2026-10-25T02:47:55.905" v="83660" actId="47"/>
-        <pc:sldMkLst>
-          <pc:docMk/>
-          <pc:sldMk cId="3775875382" sldId="689"/>
-        </pc:sldMkLst>
-      </pc:sldChg>
-      <pc:sldChg chg="addSp delSp modSp add del mod modAnim">
-        <pc:chgData name="Li, Cong" userId="025630f4-267e-4cb3-8cd5-8795177f99f4" providerId="ADAL" clId="{929A2CC8-B112-421C-81E2-D5D63B23E300}" dt="2026-10-25T02:47:55.905" v="83660" actId="47"/>
-        <pc:sldMkLst>
-          <pc:docMk/>
-          <pc:sldMk cId="1837258851" sldId="690"/>
-        </pc:sldMkLst>
-      </pc:sldChg>
-      <pc:sldChg chg="add del modAnim">
-        <pc:chgData name="Li, Cong" userId="025630f4-267e-4cb3-8cd5-8795177f99f4" providerId="ADAL" clId="{929A2CC8-B112-421C-81E2-D5D63B23E300}" dt="2026-10-25T02:47:55.905" v="83660" actId="47"/>
-        <pc:sldMkLst>
-          <pc:docMk/>
-          <pc:sldMk cId="2664850137" sldId="691"/>
-        </pc:sldMkLst>
       </pc:sldChg>
       <pc:sldChg chg="addSp delSp modSp add mod addAnim delAnim modAnim">
         <pc:chgData name="Li, Cong" userId="025630f4-267e-4cb3-8cd5-8795177f99f4" providerId="ADAL" clId="{929A2CC8-B112-421C-81E2-D5D63B23E300}" dt="2026-10-25T01:32:57.309" v="80161"/>
@@ -739,14 +396,6 @@
             <ac:spMk id="2" creationId="{B0966BE9-EFA7-8288-D33B-00DBA461ECEB}"/>
           </ac:spMkLst>
         </pc:spChg>
-        <pc:spChg chg="del">
-          <ac:chgData name="Li, Cong" userId="025630f4-267e-4cb3-8cd5-8795177f99f4" providerId="ADAL" clId="{929A2CC8-B112-421C-81E2-D5D63B23E300}" dt="2026-10-25T01:39:14.026" v="80477" actId="478"/>
-          <ac:spMkLst>
-            <pc:docMk/>
-            <pc:sldMk cId="3688104606" sldId="694"/>
-            <ac:spMk id="3" creationId="{07654B4E-DA1B-7B52-B6A6-DC204C3CB125}"/>
-          </ac:spMkLst>
-        </pc:spChg>
         <pc:spChg chg="add mod">
           <ac:chgData name="Li, Cong" userId="025630f4-267e-4cb3-8cd5-8795177f99f4" providerId="ADAL" clId="{929A2CC8-B112-421C-81E2-D5D63B23E300}" dt="2026-10-25T01:42:23.156" v="80818" actId="1076"/>
           <ac:spMkLst>
@@ -784,14 +433,6 @@
             <pc:docMk/>
             <pc:sldMk cId="3038641637" sldId="695"/>
             <ac:spMk id="2" creationId="{A17867E1-017A-7959-6EDC-778BBED11E78}"/>
-          </ac:spMkLst>
-        </pc:spChg>
-        <pc:spChg chg="del">
-          <ac:chgData name="Li, Cong" userId="025630f4-267e-4cb3-8cd5-8795177f99f4" providerId="ADAL" clId="{929A2CC8-B112-421C-81E2-D5D63B23E300}" dt="2026-10-25T01:52:45.502" v="81203" actId="478"/>
-          <ac:spMkLst>
-            <pc:docMk/>
-            <pc:sldMk cId="3038641637" sldId="695"/>
-            <ac:spMk id="3" creationId="{76417185-7986-4051-370A-428B82178155}"/>
           </ac:spMkLst>
         </pc:spChg>
         <pc:spChg chg="mod">
@@ -974,8 +615,8 @@
           </ac:spMkLst>
         </pc:spChg>
       </pc:sldChg>
-      <pc:sldChg chg="modSp add mod modAnim">
-        <pc:chgData name="Li, Cong" userId="025630f4-267e-4cb3-8cd5-8795177f99f4" providerId="ADAL" clId="{929A2CC8-B112-421C-81E2-D5D63B23E300}" dt="2026-10-26T12:13:30.810" v="97537" actId="15"/>
+      <pc:sldChg chg="addSp modSp add mod modAnim">
+        <pc:chgData name="Li, Cong" userId="025630f4-267e-4cb3-8cd5-8795177f99f4" providerId="ADAL" clId="{929A2CC8-B112-421C-81E2-D5D63B23E300}" dt="2026-10-30T23:17:43.546" v="97763" actId="1035"/>
         <pc:sldMkLst>
           <pc:docMk/>
           <pc:sldMk cId="3924990294" sldId="701"/>
@@ -994,6 +635,14 @@
             <pc:docMk/>
             <pc:sldMk cId="3924990294" sldId="701"/>
             <ac:spMk id="3" creationId="{75D65BA1-E4E0-F5B7-24BD-F2C8FB9439BA}"/>
+          </ac:spMkLst>
+        </pc:spChg>
+        <pc:spChg chg="add mod">
+          <ac:chgData name="Li, Cong" userId="025630f4-267e-4cb3-8cd5-8795177f99f4" providerId="ADAL" clId="{929A2CC8-B112-421C-81E2-D5D63B23E300}" dt="2026-10-30T23:17:43.546" v="97763" actId="1035"/>
+          <ac:spMkLst>
+            <pc:docMk/>
+            <pc:sldMk cId="3924990294" sldId="701"/>
+            <ac:spMk id="4" creationId="{50AED782-D6F1-66A3-146A-F4EE5E561321}"/>
           </ac:spMkLst>
         </pc:spChg>
       </pc:sldChg>
@@ -1027,14 +676,6 @@
             <ac:spMk id="4" creationId="{2B696103-1F93-AEEA-A0F7-947F7B9D8F00}"/>
           </ac:spMkLst>
         </pc:spChg>
-        <pc:spChg chg="del">
-          <ac:chgData name="Li, Cong" userId="025630f4-267e-4cb3-8cd5-8795177f99f4" providerId="ADAL" clId="{929A2CC8-B112-421C-81E2-D5D63B23E300}" dt="2026-10-25T05:17:30.459" v="85156" actId="478"/>
-          <ac:spMkLst>
-            <pc:docMk/>
-            <pc:sldMk cId="104085609" sldId="702"/>
-            <ac:spMk id="6" creationId="{C3117C61-B2F8-81EC-D0EC-611408F0CF22}"/>
-          </ac:spMkLst>
-        </pc:spChg>
         <pc:spChg chg="mod">
           <ac:chgData name="Li, Cong" userId="025630f4-267e-4cb3-8cd5-8795177f99f4" providerId="ADAL" clId="{929A2CC8-B112-421C-81E2-D5D63B23E300}" dt="2026-10-25T22:07:32.753" v="96479" actId="20577"/>
           <ac:spMkLst>
@@ -1058,44 +699,12 @@
             <ac:spMk id="2" creationId="{BB3078F0-FE09-8B6E-6DE0-FD03DFC71566}"/>
           </ac:spMkLst>
         </pc:spChg>
-        <pc:spChg chg="del">
-          <ac:chgData name="Li, Cong" userId="025630f4-267e-4cb3-8cd5-8795177f99f4" providerId="ADAL" clId="{929A2CC8-B112-421C-81E2-D5D63B23E300}" dt="2026-10-25T05:43:37.818" v="85738" actId="478"/>
-          <ac:spMkLst>
-            <pc:docMk/>
-            <pc:sldMk cId="1761666980" sldId="703"/>
-            <ac:spMk id="3" creationId="{CAAB77BE-2E99-8BF8-0897-E66B5BF1D37A}"/>
-          </ac:spMkLst>
-        </pc:spChg>
-        <pc:spChg chg="del">
-          <ac:chgData name="Li, Cong" userId="025630f4-267e-4cb3-8cd5-8795177f99f4" providerId="ADAL" clId="{929A2CC8-B112-421C-81E2-D5D63B23E300}" dt="2026-10-25T05:43:39.075" v="85739" actId="478"/>
-          <ac:spMkLst>
-            <pc:docMk/>
-            <pc:sldMk cId="1761666980" sldId="703"/>
-            <ac:spMk id="4" creationId="{A0A2CBB2-20A2-CE86-8C60-23D64BDC3CC1}"/>
-          </ac:spMkLst>
-        </pc:spChg>
-        <pc:spChg chg="add del mod">
-          <ac:chgData name="Li, Cong" userId="025630f4-267e-4cb3-8cd5-8795177f99f4" providerId="ADAL" clId="{929A2CC8-B112-421C-81E2-D5D63B23E300}" dt="2026-10-25T05:43:51.124" v="85741" actId="478"/>
-          <ac:spMkLst>
-            <pc:docMk/>
-            <pc:sldMk cId="1761666980" sldId="703"/>
-            <ac:spMk id="6" creationId="{B4E67019-0D81-ACE1-8A38-0EB35A1332AF}"/>
-          </ac:spMkLst>
-        </pc:spChg>
         <pc:spChg chg="add mod">
           <ac:chgData name="Li, Cong" userId="025630f4-267e-4cb3-8cd5-8795177f99f4" providerId="ADAL" clId="{929A2CC8-B112-421C-81E2-D5D63B23E300}" dt="2026-10-25T05:46:45.637" v="85923" actId="1076"/>
           <ac:spMkLst>
             <pc:docMk/>
             <pc:sldMk cId="1761666980" sldId="703"/>
             <ac:spMk id="8" creationId="{18585597-AF2C-AF4F-8B06-1EC969F476E4}"/>
-          </ac:spMkLst>
-        </pc:spChg>
-        <pc:spChg chg="del">
-          <ac:chgData name="Li, Cong" userId="025630f4-267e-4cb3-8cd5-8795177f99f4" providerId="ADAL" clId="{929A2CC8-B112-421C-81E2-D5D63B23E300}" dt="2026-10-25T05:43:36.570" v="85737" actId="478"/>
-          <ac:spMkLst>
-            <pc:docMk/>
-            <pc:sldMk cId="1761666980" sldId="703"/>
-            <ac:spMk id="10" creationId="{79AC3ED6-C841-96B8-6A0A-D4C646A67F13}"/>
           </ac:spMkLst>
         </pc:spChg>
         <pc:spChg chg="add mod">
@@ -1128,14 +737,6 @@
             <pc:docMk/>
             <pc:sldMk cId="1761666980" sldId="703"/>
             <ac:spMk id="26" creationId="{910B98BE-6CFD-A020-A0A2-6234BDCADD06}"/>
-          </ac:spMkLst>
-        </pc:spChg>
-        <pc:spChg chg="add mod">
-          <ac:chgData name="Li, Cong" userId="025630f4-267e-4cb3-8cd5-8795177f99f4" providerId="ADAL" clId="{929A2CC8-B112-421C-81E2-D5D63B23E300}" dt="2026-10-25T05:55:08.468" v="86044"/>
-          <ac:spMkLst>
-            <pc:docMk/>
-            <pc:sldMk cId="1761666980" sldId="703"/>
-            <ac:spMk id="28" creationId="{8046006E-C799-E983-F8EB-8727C328B481}"/>
           </ac:spMkLst>
         </pc:spChg>
         <pc:spChg chg="add mod">
@@ -1176,22 +777,6 @@
             <pc:docMk/>
             <pc:sldMk cId="1761666980" sldId="703"/>
             <ac:cxnSpMk id="16" creationId="{29FCEAA0-098F-0173-BC11-DCFA930A50B4}"/>
-          </ac:cxnSpMkLst>
-        </pc:cxnChg>
-        <pc:cxnChg chg="add mod">
-          <ac:chgData name="Li, Cong" userId="025630f4-267e-4cb3-8cd5-8795177f99f4" providerId="ADAL" clId="{929A2CC8-B112-421C-81E2-D5D63B23E300}" dt="2026-10-25T05:49:20.006" v="85929"/>
-          <ac:cxnSpMkLst>
-            <pc:docMk/>
-            <pc:sldMk cId="1761666980" sldId="703"/>
-            <ac:cxnSpMk id="19" creationId="{672F4493-8B40-C815-A9B9-61D2212D6BD9}"/>
-          </ac:cxnSpMkLst>
-        </pc:cxnChg>
-        <pc:cxnChg chg="add mod">
-          <ac:chgData name="Li, Cong" userId="025630f4-267e-4cb3-8cd5-8795177f99f4" providerId="ADAL" clId="{929A2CC8-B112-421C-81E2-D5D63B23E300}" dt="2026-10-25T05:49:20.476" v="85930"/>
-          <ac:cxnSpMkLst>
-            <pc:docMk/>
-            <pc:sldMk cId="1761666980" sldId="703"/>
-            <ac:cxnSpMk id="20" creationId="{1C67D69A-A3CB-7126-155C-B214395E15B4}"/>
           </ac:cxnSpMkLst>
         </pc:cxnChg>
         <pc:cxnChg chg="add mod">
@@ -1247,14 +832,6 @@
             <pc:docMk/>
             <pc:sldMk cId="2736305692" sldId="704"/>
             <ac:spMk id="3" creationId="{B1223B5F-14F6-880E-2964-D53D132D106C}"/>
-          </ac:spMkLst>
-        </pc:spChg>
-        <pc:spChg chg="del">
-          <ac:chgData name="Li, Cong" userId="025630f4-267e-4cb3-8cd5-8795177f99f4" providerId="ADAL" clId="{929A2CC8-B112-421C-81E2-D5D63B23E300}" dt="2026-10-25T07:35:10.056" v="86815" actId="478"/>
-          <ac:spMkLst>
-            <pc:docMk/>
-            <pc:sldMk cId="2736305692" sldId="704"/>
-            <ac:spMk id="4" creationId="{F58336EC-A9EA-7EC3-ED0C-9BBEA030DF23}"/>
           </ac:spMkLst>
         </pc:spChg>
         <pc:spChg chg="mod">
@@ -1405,14 +982,6 @@
             <ac:spMk id="3" creationId="{90941D40-B668-6C1A-9CFB-9AD9448E28E8}"/>
           </ac:spMkLst>
         </pc:spChg>
-        <pc:spChg chg="del">
-          <ac:chgData name="Li, Cong" userId="025630f4-267e-4cb3-8cd5-8795177f99f4" providerId="ADAL" clId="{929A2CC8-B112-421C-81E2-D5D63B23E300}" dt="2026-10-25T08:49:25.995" v="89548" actId="478"/>
-          <ac:spMkLst>
-            <pc:docMk/>
-            <pc:sldMk cId="3521352987" sldId="708"/>
-            <ac:spMk id="4" creationId="{2D77D4D2-6C98-C61D-FC37-101673A25C89}"/>
-          </ac:spMkLst>
-        </pc:spChg>
         <pc:spChg chg="mod">
           <ac:chgData name="Li, Cong" userId="025630f4-267e-4cb3-8cd5-8795177f99f4" providerId="ADAL" clId="{929A2CC8-B112-421C-81E2-D5D63B23E300}" dt="2026-10-25T08:51:23.753" v="89809" actId="1036"/>
           <ac:spMkLst>
@@ -1444,14 +1013,6 @@
             <ac:spMk id="3" creationId="{FA6E45C1-3A12-BB55-7A57-CB8C5DA4F9C9}"/>
           </ac:spMkLst>
         </pc:spChg>
-        <pc:spChg chg="del">
-          <ac:chgData name="Li, Cong" userId="025630f4-267e-4cb3-8cd5-8795177f99f4" providerId="ADAL" clId="{929A2CC8-B112-421C-81E2-D5D63B23E300}" dt="2026-10-25T09:10:49.793" v="90583" actId="478"/>
-          <ac:spMkLst>
-            <pc:docMk/>
-            <pc:sldMk cId="3192199583" sldId="709"/>
-            <ac:spMk id="4" creationId="{0F954E88-F25B-14CB-AA65-C8255B7DEE60}"/>
-          </ac:spMkLst>
-        </pc:spChg>
         <pc:spChg chg="mod">
           <ac:chgData name="Li, Cong" userId="025630f4-267e-4cb3-8cd5-8795177f99f4" providerId="ADAL" clId="{929A2CC8-B112-421C-81E2-D5D63B23E300}" dt="2026-10-25T09:08:14.126" v="90192" actId="1076"/>
           <ac:spMkLst>
@@ -1473,14 +1034,6 @@
             <pc:docMk/>
             <pc:sldMk cId="2141865905" sldId="710"/>
             <ac:spMk id="2" creationId="{CDB4E160-75D2-598E-F0B6-212F27823A01}"/>
-          </ac:spMkLst>
-        </pc:spChg>
-        <pc:spChg chg="del">
-          <ac:chgData name="Li, Cong" userId="025630f4-267e-4cb3-8cd5-8795177f99f4" providerId="ADAL" clId="{929A2CC8-B112-421C-81E2-D5D63B23E300}" dt="2026-10-25T09:20:52.073" v="90958" actId="478"/>
-          <ac:spMkLst>
-            <pc:docMk/>
-            <pc:sldMk cId="2141865905" sldId="710"/>
-            <ac:spMk id="3" creationId="{45D0CDFE-7170-79B1-5877-43882CC7FCE9}"/>
           </ac:spMkLst>
         </pc:spChg>
         <pc:spChg chg="mod">
@@ -1514,22 +1067,6 @@
             <ac:spMk id="2" creationId="{80A2D16C-6E7F-E206-25E3-CCE2A33ED0C1}"/>
           </ac:spMkLst>
         </pc:spChg>
-        <pc:spChg chg="add del mod">
-          <ac:chgData name="Li, Cong" userId="025630f4-267e-4cb3-8cd5-8795177f99f4" providerId="ADAL" clId="{929A2CC8-B112-421C-81E2-D5D63B23E300}" dt="2026-10-25T10:02:04.617" v="92138" actId="478"/>
-          <ac:spMkLst>
-            <pc:docMk/>
-            <pc:sldMk cId="1952528516" sldId="711"/>
-            <ac:spMk id="3" creationId="{7E8E97FB-A770-2DBA-878A-B6A304B6FA86}"/>
-          </ac:spMkLst>
-        </pc:spChg>
-        <pc:spChg chg="del">
-          <ac:chgData name="Li, Cong" userId="025630f4-267e-4cb3-8cd5-8795177f99f4" providerId="ADAL" clId="{929A2CC8-B112-421C-81E2-D5D63B23E300}" dt="2026-10-25T09:45:53.882" v="91392" actId="478"/>
-          <ac:spMkLst>
-            <pc:docMk/>
-            <pc:sldMk cId="1952528516" sldId="711"/>
-            <ac:spMk id="4" creationId="{20853FE5-8E6B-310C-2138-9785106ABF42}"/>
-          </ac:spMkLst>
-        </pc:spChg>
         <pc:spChg chg="add del">
           <ac:chgData name="Li, Cong" userId="025630f4-267e-4cb3-8cd5-8795177f99f4" providerId="ADAL" clId="{929A2CC8-B112-421C-81E2-D5D63B23E300}" dt="2026-10-25T09:48:07.850" v="91480" actId="478"/>
           <ac:spMkLst>
@@ -1538,156 +1075,12 @@
             <ac:spMk id="5" creationId="{0C7C2920-CCE0-810F-378C-3B9AF16BCA88}"/>
           </ac:spMkLst>
         </pc:spChg>
-        <pc:spChg chg="add del mod">
-          <ac:chgData name="Li, Cong" userId="025630f4-267e-4cb3-8cd5-8795177f99f4" providerId="ADAL" clId="{929A2CC8-B112-421C-81E2-D5D63B23E300}" dt="2026-10-25T10:02:04.617" v="92138" actId="478"/>
-          <ac:spMkLst>
-            <pc:docMk/>
-            <pc:sldMk cId="1952528516" sldId="711"/>
-            <ac:spMk id="7" creationId="{7D969C73-5464-068D-4388-CB66AAF4EB47}"/>
-          </ac:spMkLst>
-        </pc:spChg>
-        <pc:spChg chg="add del mod">
-          <ac:chgData name="Li, Cong" userId="025630f4-267e-4cb3-8cd5-8795177f99f4" providerId="ADAL" clId="{929A2CC8-B112-421C-81E2-D5D63B23E300}" dt="2026-10-25T10:02:04.617" v="92138" actId="478"/>
-          <ac:spMkLst>
-            <pc:docMk/>
-            <pc:sldMk cId="1952528516" sldId="711"/>
-            <ac:spMk id="8" creationId="{F9AA801C-6072-3B52-6082-ACAA3C626CC8}"/>
-          </ac:spMkLst>
-        </pc:spChg>
-        <pc:spChg chg="del">
-          <ac:chgData name="Li, Cong" userId="025630f4-267e-4cb3-8cd5-8795177f99f4" providerId="ADAL" clId="{929A2CC8-B112-421C-81E2-D5D63B23E300}" dt="2026-10-25T09:45:53.882" v="91392" actId="478"/>
-          <ac:spMkLst>
-            <pc:docMk/>
-            <pc:sldMk cId="1952528516" sldId="711"/>
-            <ac:spMk id="10" creationId="{DCDCBABB-BC97-A63B-3819-A1DC90C39EF4}"/>
-          </ac:spMkLst>
-        </pc:spChg>
-        <pc:spChg chg="add del mod">
-          <ac:chgData name="Li, Cong" userId="025630f4-267e-4cb3-8cd5-8795177f99f4" providerId="ADAL" clId="{929A2CC8-B112-421C-81E2-D5D63B23E300}" dt="2026-10-25T10:02:04.617" v="92138" actId="478"/>
-          <ac:spMkLst>
-            <pc:docMk/>
-            <pc:sldMk cId="1952528516" sldId="711"/>
-            <ac:spMk id="11" creationId="{C5E1F2DF-6318-3BEB-71CF-C1278B84CAAB}"/>
-          </ac:spMkLst>
-        </pc:spChg>
-        <pc:spChg chg="add del mod">
-          <ac:chgData name="Li, Cong" userId="025630f4-267e-4cb3-8cd5-8795177f99f4" providerId="ADAL" clId="{929A2CC8-B112-421C-81E2-D5D63B23E300}" dt="2026-10-25T10:02:04.617" v="92138" actId="478"/>
-          <ac:spMkLst>
-            <pc:docMk/>
-            <pc:sldMk cId="1952528516" sldId="711"/>
-            <ac:spMk id="14" creationId="{87775D3F-3912-F414-DC72-92AC1D9E190E}"/>
-          </ac:spMkLst>
-        </pc:spChg>
-        <pc:spChg chg="add del mod">
-          <ac:chgData name="Li, Cong" userId="025630f4-267e-4cb3-8cd5-8795177f99f4" providerId="ADAL" clId="{929A2CC8-B112-421C-81E2-D5D63B23E300}" dt="2026-10-25T10:02:04.617" v="92138" actId="478"/>
-          <ac:spMkLst>
-            <pc:docMk/>
-            <pc:sldMk cId="1952528516" sldId="711"/>
-            <ac:spMk id="16" creationId="{915AB0A1-0C11-51B9-3317-93BCC9A60667}"/>
-          </ac:spMkLst>
-        </pc:spChg>
-        <pc:spChg chg="add del mod">
-          <ac:chgData name="Li, Cong" userId="025630f4-267e-4cb3-8cd5-8795177f99f4" providerId="ADAL" clId="{929A2CC8-B112-421C-81E2-D5D63B23E300}" dt="2026-10-25T10:02:04.617" v="92138" actId="478"/>
-          <ac:spMkLst>
-            <pc:docMk/>
-            <pc:sldMk cId="1952528516" sldId="711"/>
-            <ac:spMk id="17" creationId="{CF694727-9A08-88BF-F4BA-8DC382FE95C0}"/>
-          </ac:spMkLst>
-        </pc:spChg>
-        <pc:spChg chg="add del mod">
-          <ac:chgData name="Li, Cong" userId="025630f4-267e-4cb3-8cd5-8795177f99f4" providerId="ADAL" clId="{929A2CC8-B112-421C-81E2-D5D63B23E300}" dt="2026-10-25T10:02:04.617" v="92138" actId="478"/>
-          <ac:spMkLst>
-            <pc:docMk/>
-            <pc:sldMk cId="1952528516" sldId="711"/>
-            <ac:spMk id="19" creationId="{7CD28059-A0D0-E578-4E90-004777320CEB}"/>
-          </ac:spMkLst>
-        </pc:spChg>
-        <pc:spChg chg="add mod">
-          <ac:chgData name="Li, Cong" userId="025630f4-267e-4cb3-8cd5-8795177f99f4" providerId="ADAL" clId="{929A2CC8-B112-421C-81E2-D5D63B23E300}" dt="2026-10-25T09:48:06.911" v="91479" actId="478"/>
-          <ac:spMkLst>
-            <pc:docMk/>
-            <pc:sldMk cId="1952528516" sldId="711"/>
-            <ac:spMk id="20" creationId="{29E9434F-950D-4F1B-2051-5985957B73AF}"/>
-          </ac:spMkLst>
-        </pc:spChg>
         <pc:spChg chg="add mod">
           <ac:chgData name="Li, Cong" userId="025630f4-267e-4cb3-8cd5-8795177f99f4" providerId="ADAL" clId="{929A2CC8-B112-421C-81E2-D5D63B23E300}" dt="2026-10-25T11:01:13.951" v="93385" actId="20577"/>
           <ac:spMkLst>
             <pc:docMk/>
             <pc:sldMk cId="1952528516" sldId="711"/>
             <ac:spMk id="21" creationId="{DACB5C4D-851E-3111-4704-432D863AC1DB}"/>
-          </ac:spMkLst>
-        </pc:spChg>
-        <pc:spChg chg="add mod">
-          <ac:chgData name="Li, Cong" userId="025630f4-267e-4cb3-8cd5-8795177f99f4" providerId="ADAL" clId="{929A2CC8-B112-421C-81E2-D5D63B23E300}" dt="2026-10-25T10:02:12.263" v="92139"/>
-          <ac:spMkLst>
-            <pc:docMk/>
-            <pc:sldMk cId="1952528516" sldId="711"/>
-            <ac:spMk id="22" creationId="{41E8FF55-9DB0-C801-ECA4-5261EB5C5DBA}"/>
-          </ac:spMkLst>
-        </pc:spChg>
-        <pc:spChg chg="add mod">
-          <ac:chgData name="Li, Cong" userId="025630f4-267e-4cb3-8cd5-8795177f99f4" providerId="ADAL" clId="{929A2CC8-B112-421C-81E2-D5D63B23E300}" dt="2026-10-25T10:02:12.263" v="92139"/>
-          <ac:spMkLst>
-            <pc:docMk/>
-            <pc:sldMk cId="1952528516" sldId="711"/>
-            <ac:spMk id="24" creationId="{EDAE80BD-C96D-FDA4-1919-1C32459CAE02}"/>
-          </ac:spMkLst>
-        </pc:spChg>
-        <pc:spChg chg="add mod">
-          <ac:chgData name="Li, Cong" userId="025630f4-267e-4cb3-8cd5-8795177f99f4" providerId="ADAL" clId="{929A2CC8-B112-421C-81E2-D5D63B23E300}" dt="2026-10-25T10:02:12.263" v="92139"/>
-          <ac:spMkLst>
-            <pc:docMk/>
-            <pc:sldMk cId="1952528516" sldId="711"/>
-            <ac:spMk id="27" creationId="{79CCBF33-EB4B-0FF2-B97B-F3ECA14C5365}"/>
-          </ac:spMkLst>
-        </pc:spChg>
-        <pc:spChg chg="add mod">
-          <ac:chgData name="Li, Cong" userId="025630f4-267e-4cb3-8cd5-8795177f99f4" providerId="ADAL" clId="{929A2CC8-B112-421C-81E2-D5D63B23E300}" dt="2026-10-25T10:02:12.263" v="92139"/>
-          <ac:spMkLst>
-            <pc:docMk/>
-            <pc:sldMk cId="1952528516" sldId="711"/>
-            <ac:spMk id="29" creationId="{5AFB5402-26A0-526B-EE95-B73D24C056FC}"/>
-          </ac:spMkLst>
-        </pc:spChg>
-        <pc:spChg chg="add mod">
-          <ac:chgData name="Li, Cong" userId="025630f4-267e-4cb3-8cd5-8795177f99f4" providerId="ADAL" clId="{929A2CC8-B112-421C-81E2-D5D63B23E300}" dt="2026-10-25T10:02:12.263" v="92139"/>
-          <ac:spMkLst>
-            <pc:docMk/>
-            <pc:sldMk cId="1952528516" sldId="711"/>
-            <ac:spMk id="30" creationId="{615C09E6-F248-95DE-685D-A0E6675C298E}"/>
-          </ac:spMkLst>
-        </pc:spChg>
-        <pc:spChg chg="add mod">
-          <ac:chgData name="Li, Cong" userId="025630f4-267e-4cb3-8cd5-8795177f99f4" providerId="ADAL" clId="{929A2CC8-B112-421C-81E2-D5D63B23E300}" dt="2026-10-25T10:02:12.263" v="92139"/>
-          <ac:spMkLst>
-            <pc:docMk/>
-            <pc:sldMk cId="1952528516" sldId="711"/>
-            <ac:spMk id="31" creationId="{28E92554-7E98-180A-1A28-7211F88476B6}"/>
-          </ac:spMkLst>
-        </pc:spChg>
-        <pc:spChg chg="add mod">
-          <ac:chgData name="Li, Cong" userId="025630f4-267e-4cb3-8cd5-8795177f99f4" providerId="ADAL" clId="{929A2CC8-B112-421C-81E2-D5D63B23E300}" dt="2026-10-25T10:02:12.263" v="92139"/>
-          <ac:spMkLst>
-            <pc:docMk/>
-            <pc:sldMk cId="1952528516" sldId="711"/>
-            <ac:spMk id="33" creationId="{BF8ADE90-B569-FCD8-04BF-3DA4614F8362}"/>
-          </ac:spMkLst>
-        </pc:spChg>
-        <pc:spChg chg="add mod">
-          <ac:chgData name="Li, Cong" userId="025630f4-267e-4cb3-8cd5-8795177f99f4" providerId="ADAL" clId="{929A2CC8-B112-421C-81E2-D5D63B23E300}" dt="2026-10-25T10:02:12.263" v="92139"/>
-          <ac:spMkLst>
-            <pc:docMk/>
-            <pc:sldMk cId="1952528516" sldId="711"/>
-            <ac:spMk id="36" creationId="{604F8C62-38AD-0296-149C-20F4CA360633}"/>
-          </ac:spMkLst>
-        </pc:spChg>
-        <pc:spChg chg="add mod">
-          <ac:chgData name="Li, Cong" userId="025630f4-267e-4cb3-8cd5-8795177f99f4" providerId="ADAL" clId="{929A2CC8-B112-421C-81E2-D5D63B23E300}" dt="2026-10-25T10:02:12.263" v="92139"/>
-          <ac:spMkLst>
-            <pc:docMk/>
-            <pc:sldMk cId="1952528516" sldId="711"/>
-            <ac:spMk id="37" creationId="{37888348-348F-E46D-3965-93ED0A85A6CD}"/>
           </ac:spMkLst>
         </pc:spChg>
         <pc:spChg chg="add mod">
@@ -1770,46 +1163,6 @@
             <ac:spMk id="54" creationId="{9A04A302-9A7B-9554-87B7-0AABB5773B49}"/>
           </ac:spMkLst>
         </pc:spChg>
-        <pc:cxnChg chg="add del mod">
-          <ac:chgData name="Li, Cong" userId="025630f4-267e-4cb3-8cd5-8795177f99f4" providerId="ADAL" clId="{929A2CC8-B112-421C-81E2-D5D63B23E300}" dt="2026-10-25T10:02:04.617" v="92138" actId="478"/>
-          <ac:cxnSpMkLst>
-            <pc:docMk/>
-            <pc:sldMk cId="1952528516" sldId="711"/>
-            <ac:cxnSpMk id="6" creationId="{89A22B5F-38E6-CC17-45AF-5C726374D48C}"/>
-          </ac:cxnSpMkLst>
-        </pc:cxnChg>
-        <pc:cxnChg chg="add mod">
-          <ac:chgData name="Li, Cong" userId="025630f4-267e-4cb3-8cd5-8795177f99f4" providerId="ADAL" clId="{929A2CC8-B112-421C-81E2-D5D63B23E300}" dt="2026-10-25T09:45:54.270" v="91393"/>
-          <ac:cxnSpMkLst>
-            <pc:docMk/>
-            <pc:sldMk cId="1952528516" sldId="711"/>
-            <ac:cxnSpMk id="9" creationId="{CBC1B96D-42EC-B608-4724-C152A5C48F8F}"/>
-          </ac:cxnSpMkLst>
-        </pc:cxnChg>
-        <pc:cxnChg chg="add del mod">
-          <ac:chgData name="Li, Cong" userId="025630f4-267e-4cb3-8cd5-8795177f99f4" providerId="ADAL" clId="{929A2CC8-B112-421C-81E2-D5D63B23E300}" dt="2026-10-25T10:02:04.617" v="92138" actId="478"/>
-          <ac:cxnSpMkLst>
-            <pc:docMk/>
-            <pc:sldMk cId="1952528516" sldId="711"/>
-            <ac:cxnSpMk id="12" creationId="{75DF2DCE-1D47-6C2B-8523-3DB13A5608BC}"/>
-          </ac:cxnSpMkLst>
-        </pc:cxnChg>
-        <pc:cxnChg chg="add mod">
-          <ac:chgData name="Li, Cong" userId="025630f4-267e-4cb3-8cd5-8795177f99f4" providerId="ADAL" clId="{929A2CC8-B112-421C-81E2-D5D63B23E300}" dt="2026-10-25T09:45:54.270" v="91393"/>
-          <ac:cxnSpMkLst>
-            <pc:docMk/>
-            <pc:sldMk cId="1952528516" sldId="711"/>
-            <ac:cxnSpMk id="15" creationId="{5EABE900-0D47-EF78-CE86-E02D58E737C4}"/>
-          </ac:cxnSpMkLst>
-        </pc:cxnChg>
-        <pc:cxnChg chg="add mod">
-          <ac:chgData name="Li, Cong" userId="025630f4-267e-4cb3-8cd5-8795177f99f4" providerId="ADAL" clId="{929A2CC8-B112-421C-81E2-D5D63B23E300}" dt="2026-10-25T10:02:12.263" v="92139"/>
-          <ac:cxnSpMkLst>
-            <pc:docMk/>
-            <pc:sldMk cId="1952528516" sldId="711"/>
-            <ac:cxnSpMk id="28" creationId="{1DB37F88-44F7-A727-B232-F7AF2FFA4500}"/>
-          </ac:cxnSpMkLst>
-        </pc:cxnChg>
       </pc:sldChg>
       <pc:sldChg chg="addSp delSp modSp add mod modAnim">
         <pc:chgData name="Li, Cong" userId="025630f4-267e-4cb3-8cd5-8795177f99f4" providerId="ADAL" clId="{929A2CC8-B112-421C-81E2-D5D63B23E300}" dt="2026-10-25T10:02:34.295" v="92143" actId="166"/>
@@ -1817,14 +1170,6 @@
           <pc:docMk/>
           <pc:sldMk cId="4098264242" sldId="712"/>
         </pc:sldMkLst>
-        <pc:spChg chg="del">
-          <ac:chgData name="Li, Cong" userId="025630f4-267e-4cb3-8cd5-8795177f99f4" providerId="ADAL" clId="{929A2CC8-B112-421C-81E2-D5D63B23E300}" dt="2026-10-25T10:00:17.523" v="92108" actId="478"/>
-          <ac:spMkLst>
-            <pc:docMk/>
-            <pc:sldMk cId="4098264242" sldId="712"/>
-            <ac:spMk id="3" creationId="{B909F047-00DA-7B5D-5EA7-A835281AB024}"/>
-          </ac:spMkLst>
-        </pc:spChg>
         <pc:spChg chg="mod">
           <ac:chgData name="Li, Cong" userId="025630f4-267e-4cb3-8cd5-8795177f99f4" providerId="ADAL" clId="{929A2CC8-B112-421C-81E2-D5D63B23E300}" dt="2026-10-25T10:00:47.517" v="92118" actId="1076"/>
           <ac:spMkLst>
@@ -1890,54 +1235,6 @@
           </ac:spMkLst>
         </pc:spChg>
         <pc:spChg chg="add mod">
-          <ac:chgData name="Li, Cong" userId="025630f4-267e-4cb3-8cd5-8795177f99f4" providerId="ADAL" clId="{929A2CC8-B112-421C-81E2-D5D63B23E300}" dt="2026-10-25T10:00:12.850" v="92107"/>
-          <ac:spMkLst>
-            <pc:docMk/>
-            <pc:sldMk cId="4098264242" sldId="712"/>
-            <ac:spMk id="22" creationId="{62B53466-E620-92B5-0FFE-ED780DF08FF0}"/>
-          </ac:spMkLst>
-        </pc:spChg>
-        <pc:spChg chg="add mod">
-          <ac:chgData name="Li, Cong" userId="025630f4-267e-4cb3-8cd5-8795177f99f4" providerId="ADAL" clId="{929A2CC8-B112-421C-81E2-D5D63B23E300}" dt="2026-10-25T10:00:12.850" v="92107"/>
-          <ac:spMkLst>
-            <pc:docMk/>
-            <pc:sldMk cId="4098264242" sldId="712"/>
-            <ac:spMk id="24" creationId="{2E94D8C9-8754-A1C3-95D6-D3C49CDA4A81}"/>
-          </ac:spMkLst>
-        </pc:spChg>
-        <pc:spChg chg="add mod">
-          <ac:chgData name="Li, Cong" userId="025630f4-267e-4cb3-8cd5-8795177f99f4" providerId="ADAL" clId="{929A2CC8-B112-421C-81E2-D5D63B23E300}" dt="2026-10-25T10:00:12.850" v="92107"/>
-          <ac:spMkLst>
-            <pc:docMk/>
-            <pc:sldMk cId="4098264242" sldId="712"/>
-            <ac:spMk id="27" creationId="{237F7281-4322-635E-EEA8-56964D9EB6B0}"/>
-          </ac:spMkLst>
-        </pc:spChg>
-        <pc:spChg chg="add mod">
-          <ac:chgData name="Li, Cong" userId="025630f4-267e-4cb3-8cd5-8795177f99f4" providerId="ADAL" clId="{929A2CC8-B112-421C-81E2-D5D63B23E300}" dt="2026-10-25T10:00:18.155" v="92109"/>
-          <ac:spMkLst>
-            <pc:docMk/>
-            <pc:sldMk cId="4098264242" sldId="712"/>
-            <ac:spMk id="28" creationId="{3B74A6E8-2978-C17F-049F-DBC08745729E}"/>
-          </ac:spMkLst>
-        </pc:spChg>
-        <pc:spChg chg="add mod">
-          <ac:chgData name="Li, Cong" userId="025630f4-267e-4cb3-8cd5-8795177f99f4" providerId="ADAL" clId="{929A2CC8-B112-421C-81E2-D5D63B23E300}" dt="2026-10-25T10:00:18.155" v="92109"/>
-          <ac:spMkLst>
-            <pc:docMk/>
-            <pc:sldMk cId="4098264242" sldId="712"/>
-            <ac:spMk id="30" creationId="{A728E4A2-9101-F03F-28F1-23B55F74F27B}"/>
-          </ac:spMkLst>
-        </pc:spChg>
-        <pc:spChg chg="add mod">
-          <ac:chgData name="Li, Cong" userId="025630f4-267e-4cb3-8cd5-8795177f99f4" providerId="ADAL" clId="{929A2CC8-B112-421C-81E2-D5D63B23E300}" dt="2026-10-25T10:00:18.155" v="92109"/>
-          <ac:spMkLst>
-            <pc:docMk/>
-            <pc:sldMk cId="4098264242" sldId="712"/>
-            <ac:spMk id="33" creationId="{1DEA2131-403B-F5AF-B574-E4C2035FB499}"/>
-          </ac:spMkLst>
-        </pc:spChg>
-        <pc:spChg chg="add mod">
           <ac:chgData name="Li, Cong" userId="025630f4-267e-4cb3-8cd5-8795177f99f4" providerId="ADAL" clId="{929A2CC8-B112-421C-81E2-D5D63B23E300}" dt="2026-10-25T10:01:15.920" v="92129" actId="1037"/>
           <ac:spMkLst>
             <pc:docMk/>
@@ -1961,14 +1258,6 @@
             <ac:spMk id="39" creationId="{5611F13D-6B7F-51F3-DB6C-A39371F2179E}"/>
           </ac:spMkLst>
         </pc:spChg>
-        <pc:cxnChg chg="del mod">
-          <ac:chgData name="Li, Cong" userId="025630f4-267e-4cb3-8cd5-8795177f99f4" providerId="ADAL" clId="{929A2CC8-B112-421C-81E2-D5D63B23E300}" dt="2026-10-25T10:00:21.488" v="92110" actId="478"/>
-          <ac:cxnSpMkLst>
-            <pc:docMk/>
-            <pc:sldMk cId="4098264242" sldId="712"/>
-            <ac:cxnSpMk id="6" creationId="{5E319510-938C-A59A-CF76-195330DF80EE}"/>
-          </ac:cxnSpMkLst>
-        </pc:cxnChg>
         <pc:cxnChg chg="mod">
           <ac:chgData name="Li, Cong" userId="025630f4-267e-4cb3-8cd5-8795177f99f4" providerId="ADAL" clId="{929A2CC8-B112-421C-81E2-D5D63B23E300}" dt="2026-10-25T10:00:02.238" v="92106" actId="1037"/>
           <ac:cxnSpMkLst>
@@ -2002,54 +1291,6 @@
           </ac:cxnSpMkLst>
         </pc:cxnChg>
         <pc:cxnChg chg="add mod">
-          <ac:chgData name="Li, Cong" userId="025630f4-267e-4cb3-8cd5-8795177f99f4" providerId="ADAL" clId="{929A2CC8-B112-421C-81E2-D5D63B23E300}" dt="2026-10-25T10:00:12.850" v="92107"/>
-          <ac:cxnSpMkLst>
-            <pc:docMk/>
-            <pc:sldMk cId="4098264242" sldId="712"/>
-            <ac:cxnSpMk id="23" creationId="{F07010C5-8C30-67E0-326F-B8BDDDA17AE9}"/>
-          </ac:cxnSpMkLst>
-        </pc:cxnChg>
-        <pc:cxnChg chg="add mod">
-          <ac:chgData name="Li, Cong" userId="025630f4-267e-4cb3-8cd5-8795177f99f4" providerId="ADAL" clId="{929A2CC8-B112-421C-81E2-D5D63B23E300}" dt="2026-10-25T10:00:12.850" v="92107"/>
-          <ac:cxnSpMkLst>
-            <pc:docMk/>
-            <pc:sldMk cId="4098264242" sldId="712"/>
-            <ac:cxnSpMk id="25" creationId="{04E1D9AB-1252-1C05-94A9-DBD5ABF1DF3F}"/>
-          </ac:cxnSpMkLst>
-        </pc:cxnChg>
-        <pc:cxnChg chg="add mod">
-          <ac:chgData name="Li, Cong" userId="025630f4-267e-4cb3-8cd5-8795177f99f4" providerId="ADAL" clId="{929A2CC8-B112-421C-81E2-D5D63B23E300}" dt="2026-10-25T10:00:12.850" v="92107"/>
-          <ac:cxnSpMkLst>
-            <pc:docMk/>
-            <pc:sldMk cId="4098264242" sldId="712"/>
-            <ac:cxnSpMk id="26" creationId="{7A645A6B-C45C-8627-D22F-1C3BDE6A1C2B}"/>
-          </ac:cxnSpMkLst>
-        </pc:cxnChg>
-        <pc:cxnChg chg="add mod">
-          <ac:chgData name="Li, Cong" userId="025630f4-267e-4cb3-8cd5-8795177f99f4" providerId="ADAL" clId="{929A2CC8-B112-421C-81E2-D5D63B23E300}" dt="2026-10-25T10:00:18.155" v="92109"/>
-          <ac:cxnSpMkLst>
-            <pc:docMk/>
-            <pc:sldMk cId="4098264242" sldId="712"/>
-            <ac:cxnSpMk id="29" creationId="{56B96B74-AC10-E040-655B-A5C91DA13326}"/>
-          </ac:cxnSpMkLst>
-        </pc:cxnChg>
-        <pc:cxnChg chg="add mod">
-          <ac:chgData name="Li, Cong" userId="025630f4-267e-4cb3-8cd5-8795177f99f4" providerId="ADAL" clId="{929A2CC8-B112-421C-81E2-D5D63B23E300}" dt="2026-10-25T10:00:18.155" v="92109"/>
-          <ac:cxnSpMkLst>
-            <pc:docMk/>
-            <pc:sldMk cId="4098264242" sldId="712"/>
-            <ac:cxnSpMk id="31" creationId="{86D7333D-04C0-4618-51EF-5C0CAC0B3555}"/>
-          </ac:cxnSpMkLst>
-        </pc:cxnChg>
-        <pc:cxnChg chg="add mod">
-          <ac:chgData name="Li, Cong" userId="025630f4-267e-4cb3-8cd5-8795177f99f4" providerId="ADAL" clId="{929A2CC8-B112-421C-81E2-D5D63B23E300}" dt="2026-10-25T10:00:18.155" v="92109"/>
-          <ac:cxnSpMkLst>
-            <pc:docMk/>
-            <pc:sldMk cId="4098264242" sldId="712"/>
-            <ac:cxnSpMk id="32" creationId="{979A9A87-6D19-6B41-0BE1-D3D9C67E1A9C}"/>
-          </ac:cxnSpMkLst>
-        </pc:cxnChg>
-        <pc:cxnChg chg="add mod">
           <ac:chgData name="Li, Cong" userId="025630f4-267e-4cb3-8cd5-8795177f99f4" providerId="ADAL" clId="{929A2CC8-B112-421C-81E2-D5D63B23E300}" dt="2026-10-25T10:01:15.920" v="92129" actId="1037"/>
           <ac:cxnSpMkLst>
             <pc:docMk/>
@@ -2080,14 +1321,6 @@
           <pc:docMk/>
           <pc:sldMk cId="867745375" sldId="713"/>
         </pc:sldMkLst>
-        <pc:spChg chg="add del mod">
-          <ac:chgData name="Li, Cong" userId="025630f4-267e-4cb3-8cd5-8795177f99f4" providerId="ADAL" clId="{929A2CC8-B112-421C-81E2-D5D63B23E300}" dt="2026-10-25T10:17:25.070" v="92415" actId="478"/>
-          <ac:spMkLst>
-            <pc:docMk/>
-            <pc:sldMk cId="867745375" sldId="713"/>
-            <ac:spMk id="3" creationId="{E110AD2B-4181-100F-70D4-B0B2786BFAD0}"/>
-          </ac:spMkLst>
-        </pc:spChg>
         <pc:spChg chg="add mod">
           <ac:chgData name="Li, Cong" userId="025630f4-267e-4cb3-8cd5-8795177f99f4" providerId="ADAL" clId="{929A2CC8-B112-421C-81E2-D5D63B23E300}" dt="2026-10-25T10:17:39.939" v="92446" actId="207"/>
           <ac:spMkLst>
@@ -2188,14 +1421,6 @@
             <pc:docMk/>
             <pc:sldMk cId="4235899450" sldId="715"/>
             <ac:spMk id="6" creationId="{8A7D92EF-8D41-F43A-A066-206AA21899D9}"/>
-          </ac:spMkLst>
-        </pc:spChg>
-        <pc:spChg chg="del">
-          <ac:chgData name="Li, Cong" userId="025630f4-267e-4cb3-8cd5-8795177f99f4" providerId="ADAL" clId="{929A2CC8-B112-421C-81E2-D5D63B23E300}" dt="2026-10-25T10:23:54.611" v="92603" actId="478"/>
-          <ac:spMkLst>
-            <pc:docMk/>
-            <pc:sldMk cId="4235899450" sldId="715"/>
-            <ac:spMk id="21" creationId="{3F2796D8-DAD9-3916-B23A-332675C8EE6C}"/>
           </ac:spMkLst>
         </pc:spChg>
       </pc:sldChg>
@@ -2299,36 +1524,12 @@
           <pc:docMk/>
           <pc:sldMk cId="4196755295" sldId="718"/>
         </pc:sldMkLst>
-        <pc:spChg chg="del">
-          <ac:chgData name="Li, Cong" userId="025630f4-267e-4cb3-8cd5-8795177f99f4" providerId="ADAL" clId="{929A2CC8-B112-421C-81E2-D5D63B23E300}" dt="2026-10-25T10:50:51.632" v="92815" actId="478"/>
-          <ac:spMkLst>
-            <pc:docMk/>
-            <pc:sldMk cId="4196755295" sldId="718"/>
-            <ac:spMk id="3" creationId="{C07BD4EB-11BF-7490-5924-737173EC04EB}"/>
-          </ac:spMkLst>
-        </pc:spChg>
         <pc:spChg chg="add mod">
           <ac:chgData name="Li, Cong" userId="025630f4-267e-4cb3-8cd5-8795177f99f4" providerId="ADAL" clId="{929A2CC8-B112-421C-81E2-D5D63B23E300}" dt="2026-10-25T10:51:16.840" v="92819" actId="1076"/>
           <ac:spMkLst>
             <pc:docMk/>
             <pc:sldMk cId="4196755295" sldId="718"/>
             <ac:spMk id="4" creationId="{DA87A4F9-27CE-71B1-A17F-EA39EF3ACFCE}"/>
-          </ac:spMkLst>
-        </pc:spChg>
-        <pc:spChg chg="del">
-          <ac:chgData name="Li, Cong" userId="025630f4-267e-4cb3-8cd5-8795177f99f4" providerId="ADAL" clId="{929A2CC8-B112-421C-81E2-D5D63B23E300}" dt="2026-10-25T10:50:51.632" v="92815" actId="478"/>
-          <ac:spMkLst>
-            <pc:docMk/>
-            <pc:sldMk cId="4196755295" sldId="718"/>
-            <ac:spMk id="6" creationId="{AA1A44A0-535A-043C-C891-70888A90CC56}"/>
-          </ac:spMkLst>
-        </pc:spChg>
-        <pc:spChg chg="del">
-          <ac:chgData name="Li, Cong" userId="025630f4-267e-4cb3-8cd5-8795177f99f4" providerId="ADAL" clId="{929A2CC8-B112-421C-81E2-D5D63B23E300}" dt="2026-10-25T10:50:51.632" v="92815" actId="478"/>
-          <ac:spMkLst>
-            <pc:docMk/>
-            <pc:sldMk cId="4196755295" sldId="718"/>
-            <ac:spMk id="7" creationId="{6E995D7D-D655-67FD-A83F-33EA0501D96E}"/>
           </ac:spMkLst>
         </pc:spChg>
         <pc:spChg chg="add mod">
@@ -2339,14 +1540,6 @@
             <ac:spMk id="8" creationId="{85EAAA90-63D5-213E-42BD-2D8BF70C534A}"/>
           </ac:spMkLst>
         </pc:spChg>
-        <pc:spChg chg="del">
-          <ac:chgData name="Li, Cong" userId="025630f4-267e-4cb3-8cd5-8795177f99f4" providerId="ADAL" clId="{929A2CC8-B112-421C-81E2-D5D63B23E300}" dt="2026-10-25T10:50:51.632" v="92815" actId="478"/>
-          <ac:spMkLst>
-            <pc:docMk/>
-            <pc:sldMk cId="4196755295" sldId="718"/>
-            <ac:spMk id="9" creationId="{F16498FA-9456-0380-C786-1C2ED22E8699}"/>
-          </ac:spMkLst>
-        </pc:spChg>
       </pc:sldChg>
       <pc:sldChg chg="delSp modSp add mod modAnim">
         <pc:chgData name="Li, Cong" userId="025630f4-267e-4cb3-8cd5-8795177f99f4" providerId="ADAL" clId="{929A2CC8-B112-421C-81E2-D5D63B23E300}" dt="2026-10-25T11:07:46.369" v="93778" actId="478"/>
@@ -2354,14 +1547,6 @@
           <pc:docMk/>
           <pc:sldMk cId="2944111302" sldId="719"/>
         </pc:sldMkLst>
-        <pc:spChg chg="del">
-          <ac:chgData name="Li, Cong" userId="025630f4-267e-4cb3-8cd5-8795177f99f4" providerId="ADAL" clId="{929A2CC8-B112-421C-81E2-D5D63B23E300}" dt="2026-10-25T11:07:46.369" v="93778" actId="478"/>
-          <ac:spMkLst>
-            <pc:docMk/>
-            <pc:sldMk cId="2944111302" sldId="719"/>
-            <ac:spMk id="4" creationId="{C6BF0D2A-BF47-EEBA-6FA5-F1D0D5A2B5C5}"/>
-          </ac:spMkLst>
-        </pc:spChg>
         <pc:spChg chg="mod">
           <ac:chgData name="Li, Cong" userId="025630f4-267e-4cb3-8cd5-8795177f99f4" providerId="ADAL" clId="{929A2CC8-B112-421C-81E2-D5D63B23E300}" dt="2026-10-25T10:58:00.866" v="93265" actId="1076"/>
           <ac:spMkLst>
@@ -2385,36 +1570,12 @@
             <ac:spMk id="2" creationId="{B45BE5A8-A394-723A-CBB1-B1BDD31BA2F7}"/>
           </ac:spMkLst>
         </pc:spChg>
-        <pc:spChg chg="add del mod">
-          <ac:chgData name="Li, Cong" userId="025630f4-267e-4cb3-8cd5-8795177f99f4" providerId="ADAL" clId="{929A2CC8-B112-421C-81E2-D5D63B23E300}" dt="2026-10-25T11:03:31.632" v="93515" actId="478"/>
-          <ac:spMkLst>
-            <pc:docMk/>
-            <pc:sldMk cId="2401716427" sldId="720"/>
-            <ac:spMk id="3" creationId="{502CAAD8-6097-4E73-C3D1-9748996CA282}"/>
-          </ac:spMkLst>
-        </pc:spChg>
-        <pc:spChg chg="add del mod">
-          <ac:chgData name="Li, Cong" userId="025630f4-267e-4cb3-8cd5-8795177f99f4" providerId="ADAL" clId="{929A2CC8-B112-421C-81E2-D5D63B23E300}" dt="2026-10-25T11:03:32.489" v="93516" actId="478"/>
-          <ac:spMkLst>
-            <pc:docMk/>
-            <pc:sldMk cId="2401716427" sldId="720"/>
-            <ac:spMk id="4" creationId="{248B0AC4-9517-55F8-1DED-DC829409639C}"/>
-          </ac:spMkLst>
-        </pc:spChg>
         <pc:spChg chg="add mod">
           <ac:chgData name="Li, Cong" userId="025630f4-267e-4cb3-8cd5-8795177f99f4" providerId="ADAL" clId="{929A2CC8-B112-421C-81E2-D5D63B23E300}" dt="2026-10-25T22:05:32.095" v="96449" actId="20577"/>
           <ac:spMkLst>
             <pc:docMk/>
             <pc:sldMk cId="2401716427" sldId="720"/>
             <ac:spMk id="6" creationId="{FBBF1A58-DE67-3196-18BB-0CEAD88C0AB3}"/>
-          </ac:spMkLst>
-        </pc:spChg>
-        <pc:spChg chg="add del mod">
-          <ac:chgData name="Li, Cong" userId="025630f4-267e-4cb3-8cd5-8795177f99f4" providerId="ADAL" clId="{929A2CC8-B112-421C-81E2-D5D63B23E300}" dt="2026-10-25T11:03:49.807" v="93543" actId="478"/>
-          <ac:spMkLst>
-            <pc:docMk/>
-            <pc:sldMk cId="2401716427" sldId="720"/>
-            <ac:spMk id="7" creationId="{461B377D-4212-D775-76D7-36B0C6A37BAD}"/>
           </ac:spMkLst>
         </pc:spChg>
         <pc:spChg chg="add mod">
@@ -2449,14 +1610,6 @@
             <ac:spMk id="21" creationId="{0563D64B-33EB-CCDE-81FD-7BA1B1328AE0}"/>
           </ac:spMkLst>
         </pc:spChg>
-        <pc:spChg chg="del mod">
-          <ac:chgData name="Li, Cong" userId="025630f4-267e-4cb3-8cd5-8795177f99f4" providerId="ADAL" clId="{929A2CC8-B112-421C-81E2-D5D63B23E300}" dt="2026-10-25T11:03:33.373" v="93517" actId="478"/>
-          <ac:spMkLst>
-            <pc:docMk/>
-            <pc:sldMk cId="2401716427" sldId="720"/>
-            <ac:spMk id="47" creationId="{1FE0226B-713F-1400-1291-98AC8E7CEEC5}"/>
-          </ac:spMkLst>
-        </pc:spChg>
         <pc:spChg chg="mod">
           <ac:chgData name="Li, Cong" userId="025630f4-267e-4cb3-8cd5-8795177f99f4" providerId="ADAL" clId="{929A2CC8-B112-421C-81E2-D5D63B23E300}" dt="2026-10-25T11:03:53.243" v="93544" actId="1076"/>
           <ac:spMkLst>
@@ -2486,30 +1639,6 @@
             <pc:docMk/>
             <pc:sldMk cId="2432485486" sldId="721"/>
             <ac:spMk id="6" creationId="{EF42364B-1B97-EE8A-F904-F9DDC3645A78}"/>
-          </ac:spMkLst>
-        </pc:spChg>
-        <pc:spChg chg="del">
-          <ac:chgData name="Li, Cong" userId="025630f4-267e-4cb3-8cd5-8795177f99f4" providerId="ADAL" clId="{929A2CC8-B112-421C-81E2-D5D63B23E300}" dt="2026-10-25T11:05:00.667" v="93638" actId="478"/>
-          <ac:spMkLst>
-            <pc:docMk/>
-            <pc:sldMk cId="2432485486" sldId="721"/>
-            <ac:spMk id="8" creationId="{496A733A-92DB-6487-6881-E569FBBF538B}"/>
-          </ac:spMkLst>
-        </pc:spChg>
-        <pc:spChg chg="del">
-          <ac:chgData name="Li, Cong" userId="025630f4-267e-4cb3-8cd5-8795177f99f4" providerId="ADAL" clId="{929A2CC8-B112-421C-81E2-D5D63B23E300}" dt="2026-10-25T11:04:59.281" v="93636" actId="478"/>
-          <ac:spMkLst>
-            <pc:docMk/>
-            <pc:sldMk cId="2432485486" sldId="721"/>
-            <ac:spMk id="9" creationId="{9626441C-13CB-47E5-A46F-0AFDAA41557E}"/>
-          </ac:spMkLst>
-        </pc:spChg>
-        <pc:spChg chg="del">
-          <ac:chgData name="Li, Cong" userId="025630f4-267e-4cb3-8cd5-8795177f99f4" providerId="ADAL" clId="{929A2CC8-B112-421C-81E2-D5D63B23E300}" dt="2026-10-25T11:04:59.970" v="93637" actId="478"/>
-          <ac:spMkLst>
-            <pc:docMk/>
-            <pc:sldMk cId="2432485486" sldId="721"/>
-            <ac:spMk id="10" creationId="{E50449C1-F53B-F0DA-044C-8BFC7F67FA66}"/>
           </ac:spMkLst>
         </pc:spChg>
         <pc:spChg chg="add mod">
@@ -2543,14 +1672,6 @@
           <pc:docMk/>
           <pc:sldMk cId="955687412" sldId="722"/>
         </pc:sldMkLst>
-        <pc:spChg chg="del">
-          <ac:chgData name="Li, Cong" userId="025630f4-267e-4cb3-8cd5-8795177f99f4" providerId="ADAL" clId="{929A2CC8-B112-421C-81E2-D5D63B23E300}" dt="2026-10-25T11:06:17.781" v="93765" actId="478"/>
-          <ac:spMkLst>
-            <pc:docMk/>
-            <pc:sldMk cId="955687412" sldId="722"/>
-            <ac:spMk id="4" creationId="{0D0C76FA-7D3A-0F52-ED8E-39B2D8900E79}"/>
-          </ac:spMkLst>
-        </pc:spChg>
         <pc:spChg chg="mod">
           <ac:chgData name="Li, Cong" userId="025630f4-267e-4cb3-8cd5-8795177f99f4" providerId="ADAL" clId="{929A2CC8-B112-421C-81E2-D5D63B23E300}" dt="2026-10-25T22:05:26.415" v="96438" actId="20577"/>
           <ac:spMkLst>
@@ -2575,28 +1696,12 @@
             <ac:spMk id="9" creationId="{D1B226C0-5423-42D0-ABB1-C6BC458CA0AC}"/>
           </ac:spMkLst>
         </pc:spChg>
-        <pc:spChg chg="del">
-          <ac:chgData name="Li, Cong" userId="025630f4-267e-4cb3-8cd5-8795177f99f4" providerId="ADAL" clId="{929A2CC8-B112-421C-81E2-D5D63B23E300}" dt="2026-10-25T11:06:18.641" v="93766" actId="478"/>
-          <ac:spMkLst>
-            <pc:docMk/>
-            <pc:sldMk cId="955687412" sldId="722"/>
-            <ac:spMk id="11" creationId="{D52DDBAE-CD10-D3DD-6B5A-AC0A42D62668}"/>
-          </ac:spMkLst>
-        </pc:spChg>
         <pc:spChg chg="add mod">
           <ac:chgData name="Li, Cong" userId="025630f4-267e-4cb3-8cd5-8795177f99f4" providerId="ADAL" clId="{929A2CC8-B112-421C-81E2-D5D63B23E300}" dt="2026-10-25T11:06:54.981" v="93774" actId="1076"/>
           <ac:spMkLst>
             <pc:docMk/>
             <pc:sldMk cId="955687412" sldId="722"/>
             <ac:spMk id="12" creationId="{E55DF1B9-8F85-1639-6909-0BBC4C4FE7E4}"/>
-          </ac:spMkLst>
-        </pc:spChg>
-        <pc:spChg chg="del">
-          <ac:chgData name="Li, Cong" userId="025630f4-267e-4cb3-8cd5-8795177f99f4" providerId="ADAL" clId="{929A2CC8-B112-421C-81E2-D5D63B23E300}" dt="2026-10-25T11:06:19.370" v="93767" actId="478"/>
-          <ac:spMkLst>
-            <pc:docMk/>
-            <pc:sldMk cId="955687412" sldId="722"/>
-            <ac:spMk id="13" creationId="{8E2B2D93-088F-FCCA-6C08-D3A7E8E9D52D}"/>
           </ac:spMkLst>
         </pc:spChg>
         <pc:spChg chg="mod">
@@ -2654,14 +1759,6 @@
             <ac:spMk id="29" creationId="{FC1EA433-10DB-6F9D-3E9D-F65E93563FA5}"/>
           </ac:spMkLst>
         </pc:spChg>
-        <pc:spChg chg="del">
-          <ac:chgData name="Li, Cong" userId="025630f4-267e-4cb3-8cd5-8795177f99f4" providerId="ADAL" clId="{929A2CC8-B112-421C-81E2-D5D63B23E300}" dt="2026-10-25T11:24:19.789" v="93850" actId="478"/>
-          <ac:spMkLst>
-            <pc:docMk/>
-            <pc:sldMk cId="4228590787" sldId="723"/>
-            <ac:spMk id="41" creationId="{6B053CF8-A758-E543-5092-D76A83A6CFB2}"/>
-          </ac:spMkLst>
-        </pc:spChg>
         <pc:cxnChg chg="add mod">
           <ac:chgData name="Li, Cong" userId="025630f4-267e-4cb3-8cd5-8795177f99f4" providerId="ADAL" clId="{929A2CC8-B112-421C-81E2-D5D63B23E300}" dt="2026-10-25T11:28:19.458" v="93987" actId="1035"/>
           <ac:cxnSpMkLst>
@@ -2676,14 +1773,6 @@
             <pc:docMk/>
             <pc:sldMk cId="4228590787" sldId="723"/>
             <ac:cxnSpMk id="9" creationId="{AD6DA8BC-87EF-EA5A-DA41-2DB159AE07C4}"/>
-          </ac:cxnSpMkLst>
-        </pc:cxnChg>
-        <pc:cxnChg chg="del">
-          <ac:chgData name="Li, Cong" userId="025630f4-267e-4cb3-8cd5-8795177f99f4" providerId="ADAL" clId="{929A2CC8-B112-421C-81E2-D5D63B23E300}" dt="2026-10-25T11:25:21.604" v="93889" actId="478"/>
-          <ac:cxnSpMkLst>
-            <pc:docMk/>
-            <pc:sldMk cId="4228590787" sldId="723"/>
-            <ac:cxnSpMk id="31" creationId="{C4B0FD59-D309-5258-C6FB-34361871591D}"/>
           </ac:cxnSpMkLst>
         </pc:cxnChg>
       </pc:sldChg>
@@ -2701,30 +1790,6 @@
             <ac:spMk id="2" creationId="{94AD2474-BAF3-6287-9198-B4279A11D489}"/>
           </ac:spMkLst>
         </pc:spChg>
-        <pc:spChg chg="del">
-          <ac:chgData name="Li, Cong" userId="025630f4-267e-4cb3-8cd5-8795177f99f4" providerId="ADAL" clId="{929A2CC8-B112-421C-81E2-D5D63B23E300}" dt="2026-10-25T11:57:37.515" v="94203" actId="478"/>
-          <ac:spMkLst>
-            <pc:docMk/>
-            <pc:sldMk cId="800486373" sldId="724"/>
-            <ac:spMk id="4" creationId="{3005B95B-2730-2541-B43F-40E8B37FCB1A}"/>
-          </ac:spMkLst>
-        </pc:spChg>
-        <pc:spChg chg="del">
-          <ac:chgData name="Li, Cong" userId="025630f4-267e-4cb3-8cd5-8795177f99f4" providerId="ADAL" clId="{929A2CC8-B112-421C-81E2-D5D63B23E300}" dt="2026-10-25T11:57:07.521" v="94072" actId="478"/>
-          <ac:spMkLst>
-            <pc:docMk/>
-            <pc:sldMk cId="800486373" sldId="724"/>
-            <ac:spMk id="8" creationId="{16B027FC-A8CF-4C22-4854-FBD11DBC0CB3}"/>
-          </ac:spMkLst>
-        </pc:spChg>
-        <pc:spChg chg="del">
-          <ac:chgData name="Li, Cong" userId="025630f4-267e-4cb3-8cd5-8795177f99f4" providerId="ADAL" clId="{929A2CC8-B112-421C-81E2-D5D63B23E300}" dt="2026-10-25T11:57:07.521" v="94072" actId="478"/>
-          <ac:spMkLst>
-            <pc:docMk/>
-            <pc:sldMk cId="800486373" sldId="724"/>
-            <ac:spMk id="13" creationId="{19A63DF5-31DE-A1D8-6784-781FE9EC1C65}"/>
-          </ac:spMkLst>
-        </pc:spChg>
         <pc:spChg chg="mod">
           <ac:chgData name="Li, Cong" userId="025630f4-267e-4cb3-8cd5-8795177f99f4" providerId="ADAL" clId="{929A2CC8-B112-421C-81E2-D5D63B23E300}" dt="2026-10-25T22:14:47.818" v="96568" actId="14100"/>
           <ac:spMkLst>
@@ -2733,84 +1798,12 @@
             <ac:spMk id="14" creationId="{32DCE602-3756-C43C-9727-9FA0F5AC8523}"/>
           </ac:spMkLst>
         </pc:spChg>
-        <pc:spChg chg="del">
-          <ac:chgData name="Li, Cong" userId="025630f4-267e-4cb3-8cd5-8795177f99f4" providerId="ADAL" clId="{929A2CC8-B112-421C-81E2-D5D63B23E300}" dt="2026-10-25T11:57:07.521" v="94072" actId="478"/>
-          <ac:spMkLst>
-            <pc:docMk/>
-            <pc:sldMk cId="800486373" sldId="724"/>
-            <ac:spMk id="15" creationId="{059854C2-95CF-4908-4EDB-7F83859C36DE}"/>
-          </ac:spMkLst>
-        </pc:spChg>
-        <pc:spChg chg="del">
-          <ac:chgData name="Li, Cong" userId="025630f4-267e-4cb3-8cd5-8795177f99f4" providerId="ADAL" clId="{929A2CC8-B112-421C-81E2-D5D63B23E300}" dt="2026-10-25T11:57:07.521" v="94072" actId="478"/>
-          <ac:spMkLst>
-            <pc:docMk/>
-            <pc:sldMk cId="800486373" sldId="724"/>
-            <ac:spMk id="21" creationId="{4A3A45C0-F8C3-D10C-7EBA-2074BED44D17}"/>
-          </ac:spMkLst>
-        </pc:spChg>
-        <pc:spChg chg="del">
-          <ac:chgData name="Li, Cong" userId="025630f4-267e-4cb3-8cd5-8795177f99f4" providerId="ADAL" clId="{929A2CC8-B112-421C-81E2-D5D63B23E300}" dt="2026-10-25T11:57:07.521" v="94072" actId="478"/>
-          <ac:spMkLst>
-            <pc:docMk/>
-            <pc:sldMk cId="800486373" sldId="724"/>
-            <ac:spMk id="26" creationId="{87202027-3488-D472-E559-540D67E1D843}"/>
-          </ac:spMkLst>
-        </pc:spChg>
-        <pc:spChg chg="del">
-          <ac:chgData name="Li, Cong" userId="025630f4-267e-4cb3-8cd5-8795177f99f4" providerId="ADAL" clId="{929A2CC8-B112-421C-81E2-D5D63B23E300}" dt="2026-10-25T11:57:43.639" v="94205" actId="478"/>
-          <ac:spMkLst>
-            <pc:docMk/>
-            <pc:sldMk cId="800486373" sldId="724"/>
-            <ac:spMk id="29" creationId="{70871DA7-B8FE-C457-C00B-A672BF306855}"/>
-          </ac:spMkLst>
-        </pc:spChg>
-        <pc:spChg chg="del">
-          <ac:chgData name="Li, Cong" userId="025630f4-267e-4cb3-8cd5-8795177f99f4" providerId="ADAL" clId="{929A2CC8-B112-421C-81E2-D5D63B23E300}" dt="2026-10-25T11:57:07.521" v="94072" actId="478"/>
-          <ac:spMkLst>
-            <pc:docMk/>
-            <pc:sldMk cId="800486373" sldId="724"/>
-            <ac:spMk id="37" creationId="{0AD1CEA2-C082-DA9D-366B-16B82B1DCB6E}"/>
-          </ac:spMkLst>
-        </pc:spChg>
         <pc:cxnChg chg="add mod">
           <ac:chgData name="Li, Cong" userId="025630f4-267e-4cb3-8cd5-8795177f99f4" providerId="ADAL" clId="{929A2CC8-B112-421C-81E2-D5D63B23E300}" dt="2026-10-25T22:14:47.818" v="96568" actId="14100"/>
           <ac:cxnSpMkLst>
             <pc:docMk/>
             <pc:sldMk cId="800486373" sldId="724"/>
             <ac:cxnSpMk id="6" creationId="{89F476D5-5100-1D6A-D956-86B4E3689989}"/>
-          </ac:cxnSpMkLst>
-        </pc:cxnChg>
-        <pc:cxnChg chg="del">
-          <ac:chgData name="Li, Cong" userId="025630f4-267e-4cb3-8cd5-8795177f99f4" providerId="ADAL" clId="{929A2CC8-B112-421C-81E2-D5D63B23E300}" dt="2026-10-25T11:57:07.521" v="94072" actId="478"/>
-          <ac:cxnSpMkLst>
-            <pc:docMk/>
-            <pc:sldMk cId="800486373" sldId="724"/>
-            <ac:cxnSpMk id="9" creationId="{67788EEB-AF27-DAED-8620-B848E53F1C4E}"/>
-          </ac:cxnSpMkLst>
-        </pc:cxnChg>
-        <pc:cxnChg chg="del mod">
-          <ac:chgData name="Li, Cong" userId="025630f4-267e-4cb3-8cd5-8795177f99f4" providerId="ADAL" clId="{929A2CC8-B112-421C-81E2-D5D63B23E300}" dt="2026-10-25T11:57:07.521" v="94072" actId="478"/>
-          <ac:cxnSpMkLst>
-            <pc:docMk/>
-            <pc:sldMk cId="800486373" sldId="724"/>
-            <ac:cxnSpMk id="11" creationId="{41800B3C-9597-B03D-811C-59AEB536BCE3}"/>
-          </ac:cxnSpMkLst>
-        </pc:cxnChg>
-        <pc:cxnChg chg="del mod">
-          <ac:chgData name="Li, Cong" userId="025630f4-267e-4cb3-8cd5-8795177f99f4" providerId="ADAL" clId="{929A2CC8-B112-421C-81E2-D5D63B23E300}" dt="2026-10-25T11:57:07.521" v="94072" actId="478"/>
-          <ac:cxnSpMkLst>
-            <pc:docMk/>
-            <pc:sldMk cId="800486373" sldId="724"/>
-            <ac:cxnSpMk id="16" creationId="{302FA4D0-91B4-7630-BFB1-5ED5FBE54974}"/>
-          </ac:cxnSpMkLst>
-        </pc:cxnChg>
-        <pc:cxnChg chg="del mod">
-          <ac:chgData name="Li, Cong" userId="025630f4-267e-4cb3-8cd5-8795177f99f4" providerId="ADAL" clId="{929A2CC8-B112-421C-81E2-D5D63B23E300}" dt="2026-10-25T11:57:07.521" v="94072" actId="478"/>
-          <ac:cxnSpMkLst>
-            <pc:docMk/>
-            <pc:sldMk cId="800486373" sldId="724"/>
-            <ac:cxnSpMk id="23" creationId="{A5D93740-D77E-2AF7-9FE1-5B35A0FD0417}"/>
           </ac:cxnSpMkLst>
         </pc:cxnChg>
       </pc:sldChg>
@@ -2826,14 +1819,6 @@
             <pc:docMk/>
             <pc:sldMk cId="1719910693" sldId="725"/>
             <ac:spMk id="2" creationId="{C841D3A2-2598-FDDC-E764-C317FE6DED2B}"/>
-          </ac:spMkLst>
-        </pc:spChg>
-        <pc:spChg chg="del">
-          <ac:chgData name="Li, Cong" userId="025630f4-267e-4cb3-8cd5-8795177f99f4" providerId="ADAL" clId="{929A2CC8-B112-421C-81E2-D5D63B23E300}" dt="2026-10-25T12:01:50.337" v="94406" actId="478"/>
-          <ac:spMkLst>
-            <pc:docMk/>
-            <pc:sldMk cId="1719910693" sldId="725"/>
-            <ac:spMk id="3" creationId="{CC3DE052-5FE0-0C7A-9500-C36601918DBC}"/>
           </ac:spMkLst>
         </pc:spChg>
         <pc:spChg chg="add mod">
@@ -2866,14 +1851,6 @@
             <pc:docMk/>
             <pc:sldMk cId="1719910693" sldId="725"/>
             <ac:spMk id="11" creationId="{D950DDEA-69DD-9D5D-7066-C74317FB41EB}"/>
-          </ac:spMkLst>
-        </pc:spChg>
-        <pc:spChg chg="del">
-          <ac:chgData name="Li, Cong" userId="025630f4-267e-4cb3-8cd5-8795177f99f4" providerId="ADAL" clId="{929A2CC8-B112-421C-81E2-D5D63B23E300}" dt="2026-10-25T12:01:50.337" v="94406" actId="478"/>
-          <ac:spMkLst>
-            <pc:docMk/>
-            <pc:sldMk cId="1719910693" sldId="725"/>
-            <ac:spMk id="14" creationId="{B01F312C-2CDC-5026-75EA-7312C2C52884}"/>
           </ac:spMkLst>
         </pc:spChg>
         <pc:spChg chg="add mod">
@@ -2972,14 +1949,6 @@
             <ac:spMk id="42" creationId="{C0596BE1-F24D-5626-E3C7-DC9460A6FCEB}"/>
           </ac:spMkLst>
         </pc:spChg>
-        <pc:cxnChg chg="del mod">
-          <ac:chgData name="Li, Cong" userId="025630f4-267e-4cb3-8cd5-8795177f99f4" providerId="ADAL" clId="{929A2CC8-B112-421C-81E2-D5D63B23E300}" dt="2026-10-25T12:01:50.337" v="94406" actId="478"/>
-          <ac:cxnSpMkLst>
-            <pc:docMk/>
-            <pc:sldMk cId="1719910693" sldId="725"/>
-            <ac:cxnSpMk id="6" creationId="{A58E33CE-BD38-8963-6D91-1B60B3CBAEBC}"/>
-          </ac:cxnSpMkLst>
-        </pc:cxnChg>
         <pc:cxnChg chg="add mod">
           <ac:chgData name="Li, Cong" userId="025630f4-267e-4cb3-8cd5-8795177f99f4" providerId="ADAL" clId="{929A2CC8-B112-421C-81E2-D5D63B23E300}" dt="2026-10-25T12:05:35.878" v="94630" actId="1036"/>
           <ac:cxnSpMkLst>
@@ -3028,37 +1997,6 @@
           </ac:spMkLst>
         </pc:spChg>
       </pc:sldChg>
-      <pc:sldChg chg="addSp modSp add del mod modAnim">
-        <pc:chgData name="Li, Cong" userId="025630f4-267e-4cb3-8cd5-8795177f99f4" providerId="ADAL" clId="{929A2CC8-B112-421C-81E2-D5D63B23E300}" dt="2026-10-26T01:03:28.703" v="97348" actId="47"/>
-        <pc:sldMkLst>
-          <pc:docMk/>
-          <pc:sldMk cId="4084964322" sldId="727"/>
-        </pc:sldMkLst>
-        <pc:spChg chg="mod">
-          <ac:chgData name="Li, Cong" userId="025630f4-267e-4cb3-8cd5-8795177f99f4" providerId="ADAL" clId="{929A2CC8-B112-421C-81E2-D5D63B23E300}" dt="2026-10-25T12:17:43.731" v="95458" actId="20577"/>
-          <ac:spMkLst>
-            <pc:docMk/>
-            <pc:sldMk cId="4084964322" sldId="727"/>
-            <ac:spMk id="2" creationId="{D61A7CE9-D617-3DBD-AB93-66252EA39F8E}"/>
-          </ac:spMkLst>
-        </pc:spChg>
-        <pc:spChg chg="mod">
-          <ac:chgData name="Li, Cong" userId="025630f4-267e-4cb3-8cd5-8795177f99f4" providerId="ADAL" clId="{929A2CC8-B112-421C-81E2-D5D63B23E300}" dt="2026-10-25T12:20:28.214" v="95756" actId="6549"/>
-          <ac:spMkLst>
-            <pc:docMk/>
-            <pc:sldMk cId="4084964322" sldId="727"/>
-            <ac:spMk id="3" creationId="{030C6C0C-64B6-FDD1-6DAC-C9412B51C2FF}"/>
-          </ac:spMkLst>
-        </pc:spChg>
-        <pc:spChg chg="add mod">
-          <ac:chgData name="Li, Cong" userId="025630f4-267e-4cb3-8cd5-8795177f99f4" providerId="ADAL" clId="{929A2CC8-B112-421C-81E2-D5D63B23E300}" dt="2026-10-25T12:23:00.131" v="95949" actId="1076"/>
-          <ac:spMkLst>
-            <pc:docMk/>
-            <pc:sldMk cId="4084964322" sldId="727"/>
-            <ac:spMk id="4" creationId="{5D63BE9B-27B0-ABDB-F534-BD92500D11CE}"/>
-          </ac:spMkLst>
-        </pc:spChg>
-      </pc:sldChg>
       <pc:sldChg chg="addSp delSp modSp add mod delAnim modAnim">
         <pc:chgData name="Li, Cong" userId="025630f4-267e-4cb3-8cd5-8795177f99f4" providerId="ADAL" clId="{929A2CC8-B112-421C-81E2-D5D63B23E300}" dt="2026-10-26T01:04:56.278" v="97365" actId="20577"/>
         <pc:sldMkLst>
@@ -3073,36 +2011,12 @@
             <ac:spMk id="2" creationId="{5ACAD5E1-8DCB-0AB3-3248-71723B957AF6}"/>
           </ac:spMkLst>
         </pc:spChg>
-        <pc:spChg chg="del">
-          <ac:chgData name="Li, Cong" userId="025630f4-267e-4cb3-8cd5-8795177f99f4" providerId="ADAL" clId="{929A2CC8-B112-421C-81E2-D5D63B23E300}" dt="2026-10-25T12:24:29.762" v="95971" actId="478"/>
-          <ac:spMkLst>
-            <pc:docMk/>
-            <pc:sldMk cId="1730691164" sldId="728"/>
-            <ac:spMk id="3" creationId="{B3D8C18E-D4D2-2A5A-8A3B-0E4B3F6CA6D1}"/>
-          </ac:spMkLst>
-        </pc:spChg>
-        <pc:spChg chg="add del mod">
-          <ac:chgData name="Li, Cong" userId="025630f4-267e-4cb3-8cd5-8795177f99f4" providerId="ADAL" clId="{929A2CC8-B112-421C-81E2-D5D63B23E300}" dt="2026-10-25T12:24:32.479" v="95972" actId="478"/>
-          <ac:spMkLst>
-            <pc:docMk/>
-            <pc:sldMk cId="1730691164" sldId="728"/>
-            <ac:spMk id="4" creationId="{A2003FED-F8E0-DA6A-71AC-182EB93E967B}"/>
-          </ac:spMkLst>
-        </pc:spChg>
         <pc:spChg chg="add mod">
           <ac:chgData name="Li, Cong" userId="025630f4-267e-4cb3-8cd5-8795177f99f4" providerId="ADAL" clId="{929A2CC8-B112-421C-81E2-D5D63B23E300}" dt="2026-10-25T12:27:02.336" v="96087" actId="1076"/>
           <ac:spMkLst>
             <pc:docMk/>
             <pc:sldMk cId="1730691164" sldId="728"/>
             <ac:spMk id="6" creationId="{8AE9409B-2064-0FF1-20C3-22233E2BBFE6}"/>
-          </ac:spMkLst>
-        </pc:spChg>
-        <pc:spChg chg="add del mod">
-          <ac:chgData name="Li, Cong" userId="025630f4-267e-4cb3-8cd5-8795177f99f4" providerId="ADAL" clId="{929A2CC8-B112-421C-81E2-D5D63B23E300}" dt="2026-10-25T12:25:31.063" v="96027" actId="478"/>
-          <ac:spMkLst>
-            <pc:docMk/>
-            <pc:sldMk cId="1730691164" sldId="728"/>
-            <ac:spMk id="7" creationId="{07A193F9-EEEB-1355-76D6-0476A410BCE1}"/>
           </ac:spMkLst>
         </pc:spChg>
         <pc:spChg chg="mod">
@@ -3153,30 +2067,6 @@
             <ac:spMk id="14" creationId="{96D4ACB3-3F11-D6AA-F557-9EA0B164F6F3}"/>
           </ac:spMkLst>
         </pc:spChg>
-        <pc:spChg chg="mod">
-          <ac:chgData name="Li, Cong" userId="025630f4-267e-4cb3-8cd5-8795177f99f4" providerId="ADAL" clId="{929A2CC8-B112-421C-81E2-D5D63B23E300}" dt="2026-10-25T12:28:44.324" v="96223" actId="1076"/>
-          <ac:spMkLst>
-            <pc:docMk/>
-            <pc:sldMk cId="1730691164" sldId="728"/>
-            <ac:spMk id="20" creationId="{FD60AA70-A4F1-3E56-BC45-4291B3A477DE}"/>
-          </ac:spMkLst>
-        </pc:spChg>
-        <pc:spChg chg="mod">
-          <ac:chgData name="Li, Cong" userId="025630f4-267e-4cb3-8cd5-8795177f99f4" providerId="ADAL" clId="{929A2CC8-B112-421C-81E2-D5D63B23E300}" dt="2026-10-25T12:28:46.661" v="96224" actId="1076"/>
-          <ac:spMkLst>
-            <pc:docMk/>
-            <pc:sldMk cId="1730691164" sldId="728"/>
-            <ac:spMk id="21" creationId="{5A138B2A-E7A1-1A8E-4199-0CA6A460B41E}"/>
-          </ac:spMkLst>
-        </pc:spChg>
-        <pc:spChg chg="mod">
-          <ac:chgData name="Li, Cong" userId="025630f4-267e-4cb3-8cd5-8795177f99f4" providerId="ADAL" clId="{929A2CC8-B112-421C-81E2-D5D63B23E300}" dt="2026-10-25T12:27:42.029" v="96090"/>
-          <ac:spMkLst>
-            <pc:docMk/>
-            <pc:sldMk cId="1730691164" sldId="728"/>
-            <ac:spMk id="22" creationId="{14337D95-D843-DC6C-E5D0-A504CF61C02A}"/>
-          </ac:spMkLst>
-        </pc:spChg>
         <pc:spChg chg="add mod">
           <ac:chgData name="Li, Cong" userId="025630f4-267e-4cb3-8cd5-8795177f99f4" providerId="ADAL" clId="{929A2CC8-B112-421C-81E2-D5D63B23E300}" dt="2026-10-26T01:04:56.278" v="97365" actId="20577"/>
           <ac:spMkLst>
@@ -3191,14 +2081,6 @@
             <pc:docMk/>
             <pc:sldMk cId="1730691164" sldId="728"/>
             <ac:spMk id="24" creationId="{9C0DDBA0-4223-935D-A552-D5B0FF297011}"/>
-          </ac:spMkLst>
-        </pc:spChg>
-        <pc:spChg chg="add mod">
-          <ac:chgData name="Li, Cong" userId="025630f4-267e-4cb3-8cd5-8795177f99f4" providerId="ADAL" clId="{929A2CC8-B112-421C-81E2-D5D63B23E300}" dt="2026-10-25T12:28:57.741" v="96228" actId="164"/>
-          <ac:spMkLst>
-            <pc:docMk/>
-            <pc:sldMk cId="1730691164" sldId="728"/>
-            <ac:spMk id="25" creationId="{33B07E46-0B67-D41B-C19A-B16384E8A7A9}"/>
           </ac:spMkLst>
         </pc:spChg>
         <pc:spChg chg="mod">
@@ -3249,22 +2131,6 @@
             <ac:grpSpMk id="18" creationId="{8142E7D6-5FD1-196F-B3BA-11105A7F8D7C}"/>
           </ac:grpSpMkLst>
         </pc:grpChg>
-        <pc:grpChg chg="add mod">
-          <ac:chgData name="Li, Cong" userId="025630f4-267e-4cb3-8cd5-8795177f99f4" providerId="ADAL" clId="{929A2CC8-B112-421C-81E2-D5D63B23E300}" dt="2026-10-25T12:28:57.741" v="96228" actId="164"/>
-          <ac:grpSpMkLst>
-            <pc:docMk/>
-            <pc:sldMk cId="1730691164" sldId="728"/>
-            <ac:grpSpMk id="19" creationId="{761DFC16-072A-84F9-D66A-BC386CAEDEC9}"/>
-          </ac:grpSpMkLst>
-        </pc:grpChg>
-        <pc:grpChg chg="add del mod">
-          <ac:chgData name="Li, Cong" userId="025630f4-267e-4cb3-8cd5-8795177f99f4" providerId="ADAL" clId="{929A2CC8-B112-421C-81E2-D5D63B23E300}" dt="2026-10-26T01:04:51.848" v="97360" actId="478"/>
-          <ac:grpSpMkLst>
-            <pc:docMk/>
-            <pc:sldMk cId="1730691164" sldId="728"/>
-            <ac:grpSpMk id="26" creationId="{35FBCF9B-5ABA-8410-CB14-0FB2F3BC5250}"/>
-          </ac:grpSpMkLst>
-        </pc:grpChg>
         <pc:cxnChg chg="add mod">
           <ac:chgData name="Li, Cong" userId="025630f4-267e-4cb3-8cd5-8795177f99f4" providerId="ADAL" clId="{929A2CC8-B112-421C-81E2-D5D63B23E300}" dt="2026-10-25T12:26:59.824" v="96085" actId="164"/>
           <ac:cxnSpMkLst>
@@ -3305,51 +2171,11 @@
           <pc:sldMk cId="491885196" sldId="729"/>
         </pc:sldMkLst>
         <pc:spChg chg="mod">
-          <ac:chgData name="Li, Cong" userId="025630f4-267e-4cb3-8cd5-8795177f99f4" providerId="ADAL" clId="{929A2CC8-B112-421C-81E2-D5D63B23E300}" dt="2026-10-25T12:30:06.309" v="96302"/>
-          <ac:spMkLst>
-            <pc:docMk/>
-            <pc:sldMk cId="491885196" sldId="729"/>
-            <ac:spMk id="7" creationId="{49AF43B5-8491-4007-0FA3-8D2ED0C1C7A4}"/>
-          </ac:spMkLst>
-        </pc:spChg>
-        <pc:spChg chg="mod">
-          <ac:chgData name="Li, Cong" userId="025630f4-267e-4cb3-8cd5-8795177f99f4" providerId="ADAL" clId="{929A2CC8-B112-421C-81E2-D5D63B23E300}" dt="2026-10-25T12:30:06.309" v="96302"/>
-          <ac:spMkLst>
-            <pc:docMk/>
-            <pc:sldMk cId="491885196" sldId="729"/>
-            <ac:spMk id="12" creationId="{FBB68CCE-B1A4-1C13-6F32-45172AB8E2E7}"/>
-          </ac:spMkLst>
-        </pc:spChg>
-        <pc:spChg chg="mod">
-          <ac:chgData name="Li, Cong" userId="025630f4-267e-4cb3-8cd5-8795177f99f4" providerId="ADAL" clId="{929A2CC8-B112-421C-81E2-D5D63B23E300}" dt="2026-10-25T12:30:06.309" v="96302"/>
-          <ac:spMkLst>
-            <pc:docMk/>
-            <pc:sldMk cId="491885196" sldId="729"/>
-            <ac:spMk id="14" creationId="{34744B68-8386-E982-139B-C9F6558BBB95}"/>
-          </ac:spMkLst>
-        </pc:spChg>
-        <pc:spChg chg="mod">
           <ac:chgData name="Li, Cong" userId="025630f4-267e-4cb3-8cd5-8795177f99f4" providerId="ADAL" clId="{929A2CC8-B112-421C-81E2-D5D63B23E300}" dt="2026-10-26T01:05:01.965" v="97371" actId="20577"/>
           <ac:spMkLst>
             <pc:docMk/>
             <pc:sldMk cId="491885196" sldId="729"/>
             <ac:spMk id="23" creationId="{6F6DE667-0DF9-BD62-2503-E05C7FA1145E}"/>
-          </ac:spMkLst>
-        </pc:spChg>
-        <pc:spChg chg="mod">
-          <ac:chgData name="Li, Cong" userId="025630f4-267e-4cb3-8cd5-8795177f99f4" providerId="ADAL" clId="{929A2CC8-B112-421C-81E2-D5D63B23E300}" dt="2026-10-25T12:30:06.309" v="96302"/>
-          <ac:spMkLst>
-            <pc:docMk/>
-            <pc:sldMk cId="491885196" sldId="729"/>
-            <ac:spMk id="24" creationId="{5E4DB900-A1D6-AFCC-8B53-378F06218369}"/>
-          </ac:spMkLst>
-        </pc:spChg>
-        <pc:spChg chg="mod">
-          <ac:chgData name="Li, Cong" userId="025630f4-267e-4cb3-8cd5-8795177f99f4" providerId="ADAL" clId="{929A2CC8-B112-421C-81E2-D5D63B23E300}" dt="2026-10-25T12:30:19.564" v="96307"/>
-          <ac:spMkLst>
-            <pc:docMk/>
-            <pc:sldMk cId="491885196" sldId="729"/>
-            <ac:spMk id="28" creationId="{22F32E86-4DC8-CF3D-8248-F424EFBF77CD}"/>
           </ac:spMkLst>
         </pc:spChg>
         <pc:spChg chg="mod">
@@ -3361,22 +2187,6 @@
           </ac:spMkLst>
         </pc:spChg>
         <pc:spChg chg="mod">
-          <ac:chgData name="Li, Cong" userId="025630f4-267e-4cb3-8cd5-8795177f99f4" providerId="ADAL" clId="{929A2CC8-B112-421C-81E2-D5D63B23E300}" dt="2026-10-25T12:30:19.564" v="96307"/>
-          <ac:spMkLst>
-            <pc:docMk/>
-            <pc:sldMk cId="491885196" sldId="729"/>
-            <ac:spMk id="29" creationId="{F989F1CD-0F2B-BD3F-F8BC-48F40EA5BE82}"/>
-          </ac:spMkLst>
-        </pc:spChg>
-        <pc:spChg chg="mod">
-          <ac:chgData name="Li, Cong" userId="025630f4-267e-4cb3-8cd5-8795177f99f4" providerId="ADAL" clId="{929A2CC8-B112-421C-81E2-D5D63B23E300}" dt="2026-10-25T12:30:19.564" v="96307"/>
-          <ac:spMkLst>
-            <pc:docMk/>
-            <pc:sldMk cId="491885196" sldId="729"/>
-            <ac:spMk id="30" creationId="{62E3A9FA-19BF-13D6-DC6F-33EC650FF149}"/>
-          </ac:spMkLst>
-        </pc:spChg>
-        <pc:spChg chg="mod">
           <ac:chgData name="Li, Cong" userId="025630f4-267e-4cb3-8cd5-8795177f99f4" providerId="ADAL" clId="{929A2CC8-B112-421C-81E2-D5D63B23E300}" dt="2026-10-26T01:05:05.939" v="97373"/>
           <ac:spMkLst>
             <pc:docMk/>
@@ -3385,27 +2195,11 @@
           </ac:spMkLst>
         </pc:spChg>
         <pc:spChg chg="mod">
-          <ac:chgData name="Li, Cong" userId="025630f4-267e-4cb3-8cd5-8795177f99f4" providerId="ADAL" clId="{929A2CC8-B112-421C-81E2-D5D63B23E300}" dt="2026-10-25T12:30:19.564" v="96307"/>
-          <ac:spMkLst>
-            <pc:docMk/>
-            <pc:sldMk cId="491885196" sldId="729"/>
-            <ac:spMk id="31" creationId="{89AC720D-68F6-670C-4344-46CB8097A6B1}"/>
-          </ac:spMkLst>
-        </pc:spChg>
-        <pc:spChg chg="mod">
           <ac:chgData name="Li, Cong" userId="025630f4-267e-4cb3-8cd5-8795177f99f4" providerId="ADAL" clId="{929A2CC8-B112-421C-81E2-D5D63B23E300}" dt="2026-10-26T01:05:05.939" v="97373"/>
           <ac:spMkLst>
             <pc:docMk/>
             <pc:sldMk cId="491885196" sldId="729"/>
             <ac:spMk id="32" creationId="{92CC6C4A-620C-7834-41F5-3924177A9BF4}"/>
-          </ac:spMkLst>
-        </pc:spChg>
-        <pc:spChg chg="mod">
-          <ac:chgData name="Li, Cong" userId="025630f4-267e-4cb3-8cd5-8795177f99f4" providerId="ADAL" clId="{929A2CC8-B112-421C-81E2-D5D63B23E300}" dt="2026-10-25T12:30:19.564" v="96307"/>
-          <ac:spMkLst>
-            <pc:docMk/>
-            <pc:sldMk cId="491885196" sldId="729"/>
-            <ac:spMk id="32" creationId="{DAC68210-4272-8C86-5232-DFA95091ECDD}"/>
           </ac:spMkLst>
         </pc:spChg>
         <pc:spChg chg="mod">
@@ -3422,46 +2216,6 @@
             <pc:docMk/>
             <pc:sldMk cId="491885196" sldId="729"/>
             <ac:spMk id="34" creationId="{2C54404D-CF69-06DE-B7F2-8D9BDB0DAB9A}"/>
-          </ac:spMkLst>
-        </pc:spChg>
-        <pc:spChg chg="mod">
-          <ac:chgData name="Li, Cong" userId="025630f4-267e-4cb3-8cd5-8795177f99f4" providerId="ADAL" clId="{929A2CC8-B112-421C-81E2-D5D63B23E300}" dt="2026-10-26T01:05:08.972" v="97375"/>
-          <ac:spMkLst>
-            <pc:docMk/>
-            <pc:sldMk cId="491885196" sldId="729"/>
-            <ac:spMk id="37" creationId="{94B88209-BC15-9128-8785-1A9CA31A5E9A}"/>
-          </ac:spMkLst>
-        </pc:spChg>
-        <pc:spChg chg="mod">
-          <ac:chgData name="Li, Cong" userId="025630f4-267e-4cb3-8cd5-8795177f99f4" providerId="ADAL" clId="{929A2CC8-B112-421C-81E2-D5D63B23E300}" dt="2026-10-26T01:05:08.972" v="97375"/>
-          <ac:spMkLst>
-            <pc:docMk/>
-            <pc:sldMk cId="491885196" sldId="729"/>
-            <ac:spMk id="39" creationId="{8BE91F07-C8BF-6DCD-35A4-A9244F445A2F}"/>
-          </ac:spMkLst>
-        </pc:spChg>
-        <pc:spChg chg="mod">
-          <ac:chgData name="Li, Cong" userId="025630f4-267e-4cb3-8cd5-8795177f99f4" providerId="ADAL" clId="{929A2CC8-B112-421C-81E2-D5D63B23E300}" dt="2026-10-26T01:05:08.972" v="97375"/>
-          <ac:spMkLst>
-            <pc:docMk/>
-            <pc:sldMk cId="491885196" sldId="729"/>
-            <ac:spMk id="40" creationId="{311642FB-6729-6921-761B-194584485FA2}"/>
-          </ac:spMkLst>
-        </pc:spChg>
-        <pc:spChg chg="mod">
-          <ac:chgData name="Li, Cong" userId="025630f4-267e-4cb3-8cd5-8795177f99f4" providerId="ADAL" clId="{929A2CC8-B112-421C-81E2-D5D63B23E300}" dt="2026-10-26T01:05:08.972" v="97375"/>
-          <ac:spMkLst>
-            <pc:docMk/>
-            <pc:sldMk cId="491885196" sldId="729"/>
-            <ac:spMk id="41" creationId="{CEDB9A16-DE64-889D-0075-508274CE15F1}"/>
-          </ac:spMkLst>
-        </pc:spChg>
-        <pc:spChg chg="mod">
-          <ac:chgData name="Li, Cong" userId="025630f4-267e-4cb3-8cd5-8795177f99f4" providerId="ADAL" clId="{929A2CC8-B112-421C-81E2-D5D63B23E300}" dt="2026-10-26T01:05:08.972" v="97375"/>
-          <ac:spMkLst>
-            <pc:docMk/>
-            <pc:sldMk cId="491885196" sldId="729"/>
-            <ac:spMk id="42" creationId="{5E6516B2-0B91-7C35-7586-2115E69F25D6}"/>
           </ac:spMkLst>
         </pc:spChg>
         <pc:spChg chg="mod">
@@ -3504,44 +2258,12 @@
             <ac:spMk id="50" creationId="{DAFB2EBC-E347-0BD1-902A-F5CFBF11F618}"/>
           </ac:spMkLst>
         </pc:spChg>
-        <pc:grpChg chg="add del mod">
-          <ac:chgData name="Li, Cong" userId="025630f4-267e-4cb3-8cd5-8795177f99f4" providerId="ADAL" clId="{929A2CC8-B112-421C-81E2-D5D63B23E300}" dt="2026-10-26T01:05:08.668" v="97374" actId="478"/>
-          <ac:grpSpMkLst>
-            <pc:docMk/>
-            <pc:sldMk cId="491885196" sldId="729"/>
-            <ac:grpSpMk id="3" creationId="{501154DF-3EDF-1A30-0F5D-599CC1AFE31B}"/>
-          </ac:grpSpMkLst>
-        </pc:grpChg>
-        <pc:grpChg chg="mod">
-          <ac:chgData name="Li, Cong" userId="025630f4-267e-4cb3-8cd5-8795177f99f4" providerId="ADAL" clId="{929A2CC8-B112-421C-81E2-D5D63B23E300}" dt="2026-10-25T12:30:06.309" v="96302"/>
-          <ac:grpSpMkLst>
-            <pc:docMk/>
-            <pc:sldMk cId="491885196" sldId="729"/>
-            <ac:grpSpMk id="4" creationId="{3C9F50F3-E45E-FF8E-EDD3-0143CD35F1C8}"/>
-          </ac:grpSpMkLst>
-        </pc:grpChg>
         <pc:grpChg chg="mod">
           <ac:chgData name="Li, Cong" userId="025630f4-267e-4cb3-8cd5-8795177f99f4" providerId="ADAL" clId="{929A2CC8-B112-421C-81E2-D5D63B23E300}" dt="2026-10-25T12:30:25.688" v="96309" actId="1076"/>
           <ac:grpSpMkLst>
             <pc:docMk/>
             <pc:sldMk cId="491885196" sldId="729"/>
             <ac:grpSpMk id="18" creationId="{77E69D69-6585-9785-4B82-F1B967AA5C18}"/>
-          </ac:grpSpMkLst>
-        </pc:grpChg>
-        <pc:grpChg chg="del">
-          <ac:chgData name="Li, Cong" userId="025630f4-267e-4cb3-8cd5-8795177f99f4" providerId="ADAL" clId="{929A2CC8-B112-421C-81E2-D5D63B23E300}" dt="2026-10-26T01:05:05.644" v="97372" actId="478"/>
-          <ac:grpSpMkLst>
-            <pc:docMk/>
-            <pc:sldMk cId="491885196" sldId="729"/>
-            <ac:grpSpMk id="26" creationId="{784B218D-A420-3CDB-2DBC-8061C1EDBD56}"/>
-          </ac:grpSpMkLst>
-        </pc:grpChg>
-        <pc:grpChg chg="add del mod">
-          <ac:chgData name="Li, Cong" userId="025630f4-267e-4cb3-8cd5-8795177f99f4" providerId="ADAL" clId="{929A2CC8-B112-421C-81E2-D5D63B23E300}" dt="2026-10-25T12:30:34.063" v="96311" actId="478"/>
-          <ac:grpSpMkLst>
-            <pc:docMk/>
-            <pc:sldMk cId="491885196" sldId="729"/>
-            <ac:grpSpMk id="27" creationId="{242BE66A-EAFE-9E40-EAC0-30EEFC06C7CA}"/>
           </ac:grpSpMkLst>
         </pc:grpChg>
         <pc:grpChg chg="add mod">
@@ -3568,30 +2290,6 @@
             <ac:grpSpMk id="30" creationId="{1C6BCC12-695A-1E1C-1CD6-FC3485166303}"/>
           </ac:grpSpMkLst>
         </pc:grpChg>
-        <pc:grpChg chg="add del mod">
-          <ac:chgData name="Li, Cong" userId="025630f4-267e-4cb3-8cd5-8795177f99f4" providerId="ADAL" clId="{929A2CC8-B112-421C-81E2-D5D63B23E300}" dt="2026-10-26T01:05:25.378" v="97381" actId="478"/>
-          <ac:grpSpMkLst>
-            <pc:docMk/>
-            <pc:sldMk cId="491885196" sldId="729"/>
-            <ac:grpSpMk id="35" creationId="{D6AA185A-D192-5066-DF33-1DF38710A501}"/>
-          </ac:grpSpMkLst>
-        </pc:grpChg>
-        <pc:grpChg chg="mod">
-          <ac:chgData name="Li, Cong" userId="025630f4-267e-4cb3-8cd5-8795177f99f4" providerId="ADAL" clId="{929A2CC8-B112-421C-81E2-D5D63B23E300}" dt="2026-10-26T01:05:08.972" v="97375"/>
-          <ac:grpSpMkLst>
-            <pc:docMk/>
-            <pc:sldMk cId="491885196" sldId="729"/>
-            <ac:grpSpMk id="36" creationId="{DCFB272A-8C96-A30A-86B5-051154DE86B2}"/>
-          </ac:grpSpMkLst>
-        </pc:grpChg>
-        <pc:grpChg chg="mod">
-          <ac:chgData name="Li, Cong" userId="025630f4-267e-4cb3-8cd5-8795177f99f4" providerId="ADAL" clId="{929A2CC8-B112-421C-81E2-D5D63B23E300}" dt="2026-10-26T01:05:08.972" v="97375"/>
-          <ac:grpSpMkLst>
-            <pc:docMk/>
-            <pc:sldMk cId="491885196" sldId="729"/>
-            <ac:grpSpMk id="38" creationId="{75267F66-C4D5-11AB-8AC7-86F0126C19B7}"/>
-          </ac:grpSpMkLst>
-        </pc:grpChg>
         <pc:grpChg chg="add mod">
           <ac:chgData name="Li, Cong" userId="025630f4-267e-4cb3-8cd5-8795177f99f4" providerId="ADAL" clId="{929A2CC8-B112-421C-81E2-D5D63B23E300}" dt="2026-10-26T01:05:25.706" v="97382"/>
           <ac:grpSpMkLst>
@@ -3616,38 +2314,6 @@
             <ac:grpSpMk id="46" creationId="{21DE5016-963C-513F-EA55-99F463268143}"/>
           </ac:grpSpMkLst>
         </pc:grpChg>
-        <pc:cxnChg chg="mod">
-          <ac:chgData name="Li, Cong" userId="025630f4-267e-4cb3-8cd5-8795177f99f4" providerId="ADAL" clId="{929A2CC8-B112-421C-81E2-D5D63B23E300}" dt="2026-10-25T12:30:34.063" v="96311" actId="478"/>
-          <ac:cxnSpMkLst>
-            <pc:docMk/>
-            <pc:sldMk cId="491885196" sldId="729"/>
-            <ac:cxnSpMk id="33" creationId="{A364906B-86BB-984F-B6F8-026A9A0E5FFA}"/>
-          </ac:cxnSpMkLst>
-        </pc:cxnChg>
-        <pc:cxnChg chg="mod">
-          <ac:chgData name="Li, Cong" userId="025630f4-267e-4cb3-8cd5-8795177f99f4" providerId="ADAL" clId="{929A2CC8-B112-421C-81E2-D5D63B23E300}" dt="2026-10-25T12:30:19.564" v="96307"/>
-          <ac:cxnSpMkLst>
-            <pc:docMk/>
-            <pc:sldMk cId="491885196" sldId="729"/>
-            <ac:cxnSpMk id="34" creationId="{A9612A31-A606-259C-B6F3-74C0BB3570E5}"/>
-          </ac:cxnSpMkLst>
-        </pc:cxnChg>
-        <pc:cxnChg chg="mod">
-          <ac:chgData name="Li, Cong" userId="025630f4-267e-4cb3-8cd5-8795177f99f4" providerId="ADAL" clId="{929A2CC8-B112-421C-81E2-D5D63B23E300}" dt="2026-10-25T12:30:19.564" v="96307"/>
-          <ac:cxnSpMkLst>
-            <pc:docMk/>
-            <pc:sldMk cId="491885196" sldId="729"/>
-            <ac:cxnSpMk id="35" creationId="{241CAEB5-5AEE-07AE-67A1-5C0C535CCB63}"/>
-          </ac:cxnSpMkLst>
-        </pc:cxnChg>
-        <pc:cxnChg chg="mod">
-          <ac:chgData name="Li, Cong" userId="025630f4-267e-4cb3-8cd5-8795177f99f4" providerId="ADAL" clId="{929A2CC8-B112-421C-81E2-D5D63B23E300}" dt="2026-10-25T12:30:19.564" v="96307"/>
-          <ac:cxnSpMkLst>
-            <pc:docMk/>
-            <pc:sldMk cId="491885196" sldId="729"/>
-            <ac:cxnSpMk id="36" creationId="{B5CF3CBD-2785-40F6-E2B1-EF5D74E9CFD7}"/>
-          </ac:cxnSpMkLst>
-        </pc:cxnChg>
       </pc:sldChg>
       <pc:sldChg chg="addSp delSp modSp add mod">
         <pc:chgData name="Li, Cong" userId="025630f4-267e-4cb3-8cd5-8795177f99f4" providerId="ADAL" clId="{929A2CC8-B112-421C-81E2-D5D63B23E300}" dt="2026-10-26T01:05:22.371" v="97380" actId="1076"/>
@@ -3719,14 +2385,6 @@
             <ac:spMk id="46" creationId="{C522683E-BFE1-429B-3BB7-EBE1BCE9352A}"/>
           </ac:spMkLst>
         </pc:spChg>
-        <pc:grpChg chg="del">
-          <ac:chgData name="Li, Cong" userId="025630f4-267e-4cb3-8cd5-8795177f99f4" providerId="ADAL" clId="{929A2CC8-B112-421C-81E2-D5D63B23E300}" dt="2026-10-26T01:05:15.730" v="97377" actId="478"/>
-          <ac:grpSpMkLst>
-            <pc:docMk/>
-            <pc:sldMk cId="2466554764" sldId="730"/>
-            <ac:grpSpMk id="3" creationId="{273E1601-3848-1016-B6D0-74C165B2D5D5}"/>
-          </ac:grpSpMkLst>
-        </pc:grpChg>
         <pc:grpChg chg="mod">
           <ac:chgData name="Li, Cong" userId="025630f4-267e-4cb3-8cd5-8795177f99f4" providerId="ADAL" clId="{929A2CC8-B112-421C-81E2-D5D63B23E300}" dt="2026-10-25T12:30:39.089" v="96313" actId="1076"/>
           <ac:grpSpMkLst>
@@ -3783,172 +2441,6 @@
             <ac:grpSpMk id="42" creationId="{2A910E97-2790-4437-E729-C76534D50ACF}"/>
           </ac:grpSpMkLst>
         </pc:grpChg>
-      </pc:sldChg>
-      <pc:sldChg chg="addSp delSp modSp add del mod modAnim">
-        <pc:chgData name="Li, Cong" userId="025630f4-267e-4cb3-8cd5-8795177f99f4" providerId="ADAL" clId="{929A2CC8-B112-421C-81E2-D5D63B23E300}" dt="2026-10-26T00:39:33.356" v="96884" actId="47"/>
-        <pc:sldMkLst>
-          <pc:docMk/>
-          <pc:sldMk cId="1786751667" sldId="731"/>
-        </pc:sldMkLst>
-        <pc:spChg chg="del">
-          <ac:chgData name="Li, Cong" userId="025630f4-267e-4cb3-8cd5-8795177f99f4" providerId="ADAL" clId="{929A2CC8-B112-421C-81E2-D5D63B23E300}" dt="2026-10-26T00:32:03.081" v="96626" actId="478"/>
-          <ac:spMkLst>
-            <pc:docMk/>
-            <pc:sldMk cId="1786751667" sldId="731"/>
-            <ac:spMk id="3" creationId="{3C371486-2AB4-DAE1-7C8C-A2095381AF41}"/>
-          </ac:spMkLst>
-        </pc:spChg>
-        <pc:spChg chg="del">
-          <ac:chgData name="Li, Cong" userId="025630f4-267e-4cb3-8cd5-8795177f99f4" providerId="ADAL" clId="{929A2CC8-B112-421C-81E2-D5D63B23E300}" dt="2026-10-26T00:32:03.081" v="96626" actId="478"/>
-          <ac:spMkLst>
-            <pc:docMk/>
-            <pc:sldMk cId="1786751667" sldId="731"/>
-            <ac:spMk id="4" creationId="{F4F84462-B660-0BAC-7F49-660BC4368B02}"/>
-          </ac:spMkLst>
-        </pc:spChg>
-        <pc:spChg chg="add del mod">
-          <ac:chgData name="Li, Cong" userId="025630f4-267e-4cb3-8cd5-8795177f99f4" providerId="ADAL" clId="{929A2CC8-B112-421C-81E2-D5D63B23E300}" dt="2026-10-26T00:32:05.905" v="96627" actId="478"/>
-          <ac:spMkLst>
-            <pc:docMk/>
-            <pc:sldMk cId="1786751667" sldId="731"/>
-            <ac:spMk id="6" creationId="{99253D44-51D5-CC87-E023-3E65DAC16466}"/>
-          </ac:spMkLst>
-        </pc:spChg>
-        <pc:spChg chg="add mod">
-          <ac:chgData name="Li, Cong" userId="025630f4-267e-4cb3-8cd5-8795177f99f4" providerId="ADAL" clId="{929A2CC8-B112-421C-81E2-D5D63B23E300}" dt="2026-10-26T00:35:23.744" v="96749" actId="1036"/>
-          <ac:spMkLst>
-            <pc:docMk/>
-            <pc:sldMk cId="1786751667" sldId="731"/>
-            <ac:spMk id="8" creationId="{DBDF41B3-4800-49DA-A08E-1C7EFBFDBD22}"/>
-          </ac:spMkLst>
-        </pc:spChg>
-        <pc:spChg chg="add mod">
-          <ac:chgData name="Li, Cong" userId="025630f4-267e-4cb3-8cd5-8795177f99f4" providerId="ADAL" clId="{929A2CC8-B112-421C-81E2-D5D63B23E300}" dt="2026-10-26T00:35:23.744" v="96749" actId="1036"/>
-          <ac:spMkLst>
-            <pc:docMk/>
-            <pc:sldMk cId="1786751667" sldId="731"/>
-            <ac:spMk id="10" creationId="{4CC6D577-0A6E-49A8-FEC7-70EE3CCDF054}"/>
-          </ac:spMkLst>
-        </pc:spChg>
-        <pc:spChg chg="add mod">
-          <ac:chgData name="Li, Cong" userId="025630f4-267e-4cb3-8cd5-8795177f99f4" providerId="ADAL" clId="{929A2CC8-B112-421C-81E2-D5D63B23E300}" dt="2026-10-26T00:35:23.744" v="96749" actId="1036"/>
-          <ac:spMkLst>
-            <pc:docMk/>
-            <pc:sldMk cId="1786751667" sldId="731"/>
-            <ac:spMk id="12" creationId="{37760000-C157-7C1E-0FF2-294745EFFD81}"/>
-          </ac:spMkLst>
-        </pc:spChg>
-        <pc:spChg chg="add mod topLvl">
-          <ac:chgData name="Li, Cong" userId="025630f4-267e-4cb3-8cd5-8795177f99f4" providerId="ADAL" clId="{929A2CC8-B112-421C-81E2-D5D63B23E300}" dt="2026-10-26T00:35:39.424" v="96751" actId="165"/>
-          <ac:spMkLst>
-            <pc:docMk/>
-            <pc:sldMk cId="1786751667" sldId="731"/>
-            <ac:spMk id="26" creationId="{93FAE541-4639-856F-F89D-44FBD7A9B267}"/>
-          </ac:spMkLst>
-        </pc:spChg>
-        <pc:spChg chg="add mod topLvl">
-          <ac:chgData name="Li, Cong" userId="025630f4-267e-4cb3-8cd5-8795177f99f4" providerId="ADAL" clId="{929A2CC8-B112-421C-81E2-D5D63B23E300}" dt="2026-10-26T00:35:39.424" v="96751" actId="165"/>
-          <ac:spMkLst>
-            <pc:docMk/>
-            <pc:sldMk cId="1786751667" sldId="731"/>
-            <ac:spMk id="27" creationId="{2D78874A-6ECF-49D8-1A78-398387D950E5}"/>
-          </ac:spMkLst>
-        </pc:spChg>
-        <pc:spChg chg="add mod topLvl">
-          <ac:chgData name="Li, Cong" userId="025630f4-267e-4cb3-8cd5-8795177f99f4" providerId="ADAL" clId="{929A2CC8-B112-421C-81E2-D5D63B23E300}" dt="2026-10-26T00:35:39.424" v="96751" actId="165"/>
-          <ac:spMkLst>
-            <pc:docMk/>
-            <pc:sldMk cId="1786751667" sldId="731"/>
-            <ac:spMk id="29" creationId="{5ABBEA0C-1452-58B0-4566-EB13A900C432}"/>
-          </ac:spMkLst>
-        </pc:spChg>
-        <pc:spChg chg="add mod topLvl">
-          <ac:chgData name="Li, Cong" userId="025630f4-267e-4cb3-8cd5-8795177f99f4" providerId="ADAL" clId="{929A2CC8-B112-421C-81E2-D5D63B23E300}" dt="2026-10-26T00:35:39.424" v="96751" actId="165"/>
-          <ac:spMkLst>
-            <pc:docMk/>
-            <pc:sldMk cId="1786751667" sldId="731"/>
-            <ac:spMk id="31" creationId="{4F8022CB-DDF9-E1CF-0E6F-DC31913693B0}"/>
-          </ac:spMkLst>
-        </pc:spChg>
-        <pc:spChg chg="add mod">
-          <ac:chgData name="Li, Cong" userId="025630f4-267e-4cb3-8cd5-8795177f99f4" providerId="ADAL" clId="{929A2CC8-B112-421C-81E2-D5D63B23E300}" dt="2026-10-26T00:36:32.647" v="96821" actId="1076"/>
-          <ac:spMkLst>
-            <pc:docMk/>
-            <pc:sldMk cId="1786751667" sldId="731"/>
-            <ac:spMk id="33" creationId="{EFF33E60-EB23-9D06-288C-16A8C1AC8809}"/>
-          </ac:spMkLst>
-        </pc:spChg>
-        <pc:spChg chg="add mod">
-          <ac:chgData name="Li, Cong" userId="025630f4-267e-4cb3-8cd5-8795177f99f4" providerId="ADAL" clId="{929A2CC8-B112-421C-81E2-D5D63B23E300}" dt="2026-10-26T00:37:49.043" v="96860" actId="207"/>
-          <ac:spMkLst>
-            <pc:docMk/>
-            <pc:sldMk cId="1786751667" sldId="731"/>
-            <ac:spMk id="34" creationId="{44A54EFD-10B0-7D37-9480-1BDB1B05AAE2}"/>
-          </ac:spMkLst>
-        </pc:spChg>
-        <pc:spChg chg="add mod">
-          <ac:chgData name="Li, Cong" userId="025630f4-267e-4cb3-8cd5-8795177f99f4" providerId="ADAL" clId="{929A2CC8-B112-421C-81E2-D5D63B23E300}" dt="2026-10-26T00:37:52.858" v="96862" actId="207"/>
-          <ac:spMkLst>
-            <pc:docMk/>
-            <pc:sldMk cId="1786751667" sldId="731"/>
-            <ac:spMk id="35" creationId="{A3C9A310-39AD-486E-05F8-4B9D8A4562DD}"/>
-          </ac:spMkLst>
-        </pc:spChg>
-        <pc:spChg chg="add mod">
-          <ac:chgData name="Li, Cong" userId="025630f4-267e-4cb3-8cd5-8795177f99f4" providerId="ADAL" clId="{929A2CC8-B112-421C-81E2-D5D63B23E300}" dt="2026-10-26T00:37:57.173" v="96864" actId="207"/>
-          <ac:spMkLst>
-            <pc:docMk/>
-            <pc:sldMk cId="1786751667" sldId="731"/>
-            <ac:spMk id="36" creationId="{41934AED-65BC-D6CF-3377-0B1469AEDAA2}"/>
-          </ac:spMkLst>
-        </pc:spChg>
-        <pc:grpChg chg="add del mod">
-          <ac:chgData name="Li, Cong" userId="025630f4-267e-4cb3-8cd5-8795177f99f4" providerId="ADAL" clId="{929A2CC8-B112-421C-81E2-D5D63B23E300}" dt="2026-10-26T00:35:39.424" v="96751" actId="165"/>
-          <ac:grpSpMkLst>
-            <pc:docMk/>
-            <pc:sldMk cId="1786751667" sldId="731"/>
-            <ac:grpSpMk id="32" creationId="{467E04BB-D408-9772-7A32-4CD6CE696017}"/>
-          </ac:grpSpMkLst>
-        </pc:grpChg>
-        <pc:cxnChg chg="add mod">
-          <ac:chgData name="Li, Cong" userId="025630f4-267e-4cb3-8cd5-8795177f99f4" providerId="ADAL" clId="{929A2CC8-B112-421C-81E2-D5D63B23E300}" dt="2026-10-26T00:35:23.744" v="96749" actId="1036"/>
-          <ac:cxnSpMkLst>
-            <pc:docMk/>
-            <pc:sldMk cId="1786751667" sldId="731"/>
-            <ac:cxnSpMk id="14" creationId="{55DA935E-B09D-6E87-873A-4502E310B392}"/>
-          </ac:cxnSpMkLst>
-        </pc:cxnChg>
-        <pc:cxnChg chg="add mod">
-          <ac:chgData name="Li, Cong" userId="025630f4-267e-4cb3-8cd5-8795177f99f4" providerId="ADAL" clId="{929A2CC8-B112-421C-81E2-D5D63B23E300}" dt="2026-10-26T00:35:23.744" v="96749" actId="1036"/>
-          <ac:cxnSpMkLst>
-            <pc:docMk/>
-            <pc:sldMk cId="1786751667" sldId="731"/>
-            <ac:cxnSpMk id="16" creationId="{BF50D8E7-DC97-1685-686C-65382C89529E}"/>
-          </ac:cxnSpMkLst>
-        </pc:cxnChg>
-        <pc:cxnChg chg="add mod">
-          <ac:chgData name="Li, Cong" userId="025630f4-267e-4cb3-8cd5-8795177f99f4" providerId="ADAL" clId="{929A2CC8-B112-421C-81E2-D5D63B23E300}" dt="2026-10-26T00:35:23.744" v="96749" actId="1036"/>
-          <ac:cxnSpMkLst>
-            <pc:docMk/>
-            <pc:sldMk cId="1786751667" sldId="731"/>
-            <ac:cxnSpMk id="19" creationId="{E8AD4974-F655-7D55-9FA2-3B655B345B7B}"/>
-          </ac:cxnSpMkLst>
-        </pc:cxnChg>
-        <pc:cxnChg chg="add mod">
-          <ac:chgData name="Li, Cong" userId="025630f4-267e-4cb3-8cd5-8795177f99f4" providerId="ADAL" clId="{929A2CC8-B112-421C-81E2-D5D63B23E300}" dt="2026-10-26T00:35:23.744" v="96749" actId="1036"/>
-          <ac:cxnSpMkLst>
-            <pc:docMk/>
-            <pc:sldMk cId="1786751667" sldId="731"/>
-            <ac:cxnSpMk id="22" creationId="{6A01A89D-DF97-ACAD-F364-E11CD158AB2D}"/>
-          </ac:cxnSpMkLst>
-        </pc:cxnChg>
-      </pc:sldChg>
-      <pc:sldChg chg="add del">
-        <pc:chgData name="Li, Cong" userId="025630f4-267e-4cb3-8cd5-8795177f99f4" providerId="ADAL" clId="{929A2CC8-B112-421C-81E2-D5D63B23E300}" dt="2026-10-26T00:32:07.178" v="96629"/>
-        <pc:sldMkLst>
-          <pc:docMk/>
-          <pc:sldMk cId="1052384249" sldId="732"/>
-        </pc:sldMkLst>
       </pc:sldChg>
       <pc:sldChg chg="modSp add mod">
         <pc:chgData name="Li, Cong" userId="025630f4-267e-4cb3-8cd5-8795177f99f4" providerId="ADAL" clId="{929A2CC8-B112-421C-81E2-D5D63B23E300}" dt="2026-10-26T00:39:30.910" v="96883" actId="1076"/>
@@ -4051,22 +2543,6 @@
           <pc:docMk/>
           <pc:sldMk cId="4228788392" sldId="733"/>
         </pc:sldMkLst>
-        <pc:spChg chg="add del mod">
-          <ac:chgData name="Li, Cong" userId="025630f4-267e-4cb3-8cd5-8795177f99f4" providerId="ADAL" clId="{929A2CC8-B112-421C-81E2-D5D63B23E300}" dt="2026-10-26T00:49:54.636" v="97076" actId="478"/>
-          <ac:spMkLst>
-            <pc:docMk/>
-            <pc:sldMk cId="4228788392" sldId="733"/>
-            <ac:spMk id="3" creationId="{0231F0E2-E3AD-2BEA-3A12-6A3357C3DF4B}"/>
-          </ac:spMkLst>
-        </pc:spChg>
-        <pc:spChg chg="add del mod">
-          <ac:chgData name="Li, Cong" userId="025630f4-267e-4cb3-8cd5-8795177f99f4" providerId="ADAL" clId="{929A2CC8-B112-421C-81E2-D5D63B23E300}" dt="2026-10-26T00:49:53.121" v="97075" actId="478"/>
-          <ac:spMkLst>
-            <pc:docMk/>
-            <pc:sldMk cId="4228788392" sldId="733"/>
-            <ac:spMk id="4" creationId="{B32E9A4A-016F-1FEE-8410-FDEC3F815942}"/>
-          </ac:spMkLst>
-        </pc:spChg>
         <pc:spChg chg="add mod">
           <ac:chgData name="Li, Cong" userId="025630f4-267e-4cb3-8cd5-8795177f99f4" providerId="ADAL" clId="{929A2CC8-B112-421C-81E2-D5D63B23E300}" dt="2026-10-26T12:21:59.154" v="97543" actId="1076"/>
           <ac:spMkLst>
@@ -4115,46 +2591,6 @@
             <ac:spMk id="26" creationId="{618D94AF-4911-97D1-DC6E-CA4FFF89F491}"/>
           </ac:spMkLst>
         </pc:spChg>
-        <pc:spChg chg="del">
-          <ac:chgData name="Li, Cong" userId="025630f4-267e-4cb3-8cd5-8795177f99f4" providerId="ADAL" clId="{929A2CC8-B112-421C-81E2-D5D63B23E300}" dt="2026-10-26T00:40:08.199" v="96890" actId="478"/>
-          <ac:spMkLst>
-            <pc:docMk/>
-            <pc:sldMk cId="4228788392" sldId="733"/>
-            <ac:spMk id="27" creationId="{F264FCE8-31A9-9A7C-7C97-9530840246B7}"/>
-          </ac:spMkLst>
-        </pc:spChg>
-        <pc:spChg chg="del">
-          <ac:chgData name="Li, Cong" userId="025630f4-267e-4cb3-8cd5-8795177f99f4" providerId="ADAL" clId="{929A2CC8-B112-421C-81E2-D5D63B23E300}" dt="2026-10-26T00:40:02.837" v="96887" actId="478"/>
-          <ac:spMkLst>
-            <pc:docMk/>
-            <pc:sldMk cId="4228788392" sldId="733"/>
-            <ac:spMk id="29" creationId="{F35E425C-2E9B-B749-6BD3-F17D30BEDC7D}"/>
-          </ac:spMkLst>
-        </pc:spChg>
-        <pc:spChg chg="del">
-          <ac:chgData name="Li, Cong" userId="025630f4-267e-4cb3-8cd5-8795177f99f4" providerId="ADAL" clId="{929A2CC8-B112-421C-81E2-D5D63B23E300}" dt="2026-10-26T00:40:00.748" v="96886" actId="478"/>
-          <ac:spMkLst>
-            <pc:docMk/>
-            <pc:sldMk cId="4228788392" sldId="733"/>
-            <ac:spMk id="33" creationId="{200A6513-5AA1-169C-1802-5A9FA1343F10}"/>
-          </ac:spMkLst>
-        </pc:spChg>
-        <pc:spChg chg="del">
-          <ac:chgData name="Li, Cong" userId="025630f4-267e-4cb3-8cd5-8795177f99f4" providerId="ADAL" clId="{929A2CC8-B112-421C-81E2-D5D63B23E300}" dt="2026-10-26T00:40:02.837" v="96887" actId="478"/>
-          <ac:spMkLst>
-            <pc:docMk/>
-            <pc:sldMk cId="4228788392" sldId="733"/>
-            <ac:spMk id="34" creationId="{1E03A6FF-8BED-E46B-6834-F6C9DE98B582}"/>
-          </ac:spMkLst>
-        </pc:spChg>
-        <pc:spChg chg="del">
-          <ac:chgData name="Li, Cong" userId="025630f4-267e-4cb3-8cd5-8795177f99f4" providerId="ADAL" clId="{929A2CC8-B112-421C-81E2-D5D63B23E300}" dt="2026-10-26T00:40:02.837" v="96887" actId="478"/>
-          <ac:spMkLst>
-            <pc:docMk/>
-            <pc:sldMk cId="4228788392" sldId="733"/>
-            <ac:spMk id="35" creationId="{F510550D-01FA-BA85-078D-20FE349E5315}"/>
-          </ac:spMkLst>
-        </pc:spChg>
       </pc:sldChg>
       <pc:sldChg chg="addSp delSp modSp add mod ord modAnim">
         <pc:chgData name="Li, Cong" userId="025630f4-267e-4cb3-8cd5-8795177f99f4" providerId="ADAL" clId="{929A2CC8-B112-421C-81E2-D5D63B23E300}" dt="2026-10-26T00:49:49.983" v="97074"/>
@@ -4176,14 +2612,6 @@
             <pc:docMk/>
             <pc:sldMk cId="3641172149" sldId="734"/>
             <ac:spMk id="6" creationId="{8E7A0B66-F74E-2BD3-56D4-84754E65C418}"/>
-          </ac:spMkLst>
-        </pc:spChg>
-        <pc:spChg chg="del">
-          <ac:chgData name="Li, Cong" userId="025630f4-267e-4cb3-8cd5-8795177f99f4" providerId="ADAL" clId="{929A2CC8-B112-421C-81E2-D5D63B23E300}" dt="2026-10-26T00:49:38.078" v="97072" actId="478"/>
-          <ac:spMkLst>
-            <pc:docMk/>
-            <pc:sldMk cId="3641172149" sldId="734"/>
-            <ac:spMk id="36" creationId="{E20BFF2A-A855-F837-BDD7-DDD33E26D828}"/>
           </ac:spMkLst>
         </pc:spChg>
       </pc:sldChg>
@@ -4217,22 +2645,6 @@
             <ac:spMk id="9" creationId="{DA798883-F3F6-6AC7-EF08-49594B9E8A4F}"/>
           </ac:spMkLst>
         </pc:spChg>
-        <pc:spChg chg="del">
-          <ac:chgData name="Li, Cong" userId="025630f4-267e-4cb3-8cd5-8795177f99f4" providerId="ADAL" clId="{929A2CC8-B112-421C-81E2-D5D63B23E300}" dt="2026-10-26T00:53:51.987" v="97287" actId="478"/>
-          <ac:spMkLst>
-            <pc:docMk/>
-            <pc:sldMk cId="984711930" sldId="735"/>
-            <ac:spMk id="13" creationId="{6F81E1CF-3BD4-F22C-AC3A-F59B67FDCAE0}"/>
-          </ac:spMkLst>
-        </pc:spChg>
-        <pc:spChg chg="del">
-          <ac:chgData name="Li, Cong" userId="025630f4-267e-4cb3-8cd5-8795177f99f4" providerId="ADAL" clId="{929A2CC8-B112-421C-81E2-D5D63B23E300}" dt="2026-10-26T00:53:41.722" v="97258" actId="478"/>
-          <ac:spMkLst>
-            <pc:docMk/>
-            <pc:sldMk cId="984711930" sldId="735"/>
-            <ac:spMk id="15" creationId="{530999E5-3869-F9CB-B64B-526714BE5033}"/>
-          </ac:spMkLst>
-        </pc:spChg>
         <pc:spChg chg="add mod">
           <ac:chgData name="Li, Cong" userId="025630f4-267e-4cb3-8cd5-8795177f99f4" providerId="ADAL" clId="{929A2CC8-B112-421C-81E2-D5D63B23E300}" dt="2026-10-26T00:53:49.465" v="97286" actId="1036"/>
           <ac:spMkLst>
@@ -4263,14 +2675,6 @@
             <pc:docMk/>
             <pc:sldMk cId="984711930" sldId="735"/>
             <ac:spMk id="23" creationId="{5F459919-C451-EA4C-CCEC-A8FB79444512}"/>
-          </ac:spMkLst>
-        </pc:spChg>
-        <pc:spChg chg="del mod">
-          <ac:chgData name="Li, Cong" userId="025630f4-267e-4cb3-8cd5-8795177f99f4" providerId="ADAL" clId="{929A2CC8-B112-421C-81E2-D5D63B23E300}" dt="2026-10-26T00:53:55.524" v="97288" actId="478"/>
-          <ac:spMkLst>
-            <pc:docMk/>
-            <pc:sldMk cId="984711930" sldId="735"/>
-            <ac:spMk id="36" creationId="{55450987-DA2F-CB9C-05B9-9127B272F395}"/>
           </ac:spMkLst>
         </pc:spChg>
       </pc:sldChg>
@@ -47585,6 +45989,77 @@
           </a:p>
         </p:txBody>
       </p:sp>
+      <p:sp>
+        <p:nvSpPr>
+          <p:cNvPr id="4" name="TextBox 3">
+            <a:extLst>
+              <a:ext uri="{FF2B5EF4-FFF2-40B4-BE49-F238E27FC236}">
+                <a16:creationId xmlns:a16="http://schemas.microsoft.com/office/drawing/2014/main" id="{50AED782-D6F1-66A3-146A-F4EE5E561321}"/>
+              </a:ext>
+            </a:extLst>
+          </p:cNvPr>
+          <p:cNvSpPr txBox="1"/>
+          <p:nvPr/>
+        </p:nvSpPr>
+        <p:spPr>
+          <a:xfrm>
+            <a:off x="55947" y="5105400"/>
+            <a:ext cx="9032106" cy="1200329"/>
+          </a:xfrm>
+          <a:prstGeom prst="rect">
+            <a:avLst/>
+          </a:prstGeom>
+          <a:solidFill>
+            <a:schemeClr val="tx2">
+              <a:lumMod val="75000"/>
+            </a:schemeClr>
+          </a:solidFill>
+        </p:spPr>
+        <p:txBody>
+          <a:bodyPr wrap="square" rtlCol="0">
+            <a:spAutoFit/>
+          </a:bodyPr>
+          <a:lstStyle/>
+          <a:p>
+            <a:pPr algn="ctr"/>
+            <a:r>
+              <a:rPr lang="en-US" altLang="zh-CN" sz="2400" i="1" dirty="0">
+                <a:solidFill>
+                  <a:schemeClr val="bg1"/>
+                </a:solidFill>
+              </a:rPr>
+              <a:t>The course tells you the perspectives to think about, </a:t>
+            </a:r>
+          </a:p>
+          <a:p>
+            <a:pPr algn="ctr"/>
+            <a:r>
+              <a:rPr lang="en-US" altLang="zh-CN" sz="2400" i="1" dirty="0">
+                <a:solidFill>
+                  <a:schemeClr val="bg1"/>
+                </a:solidFill>
+              </a:rPr>
+              <a:t>but not all the answers</a:t>
+            </a:r>
+          </a:p>
+          <a:p>
+            <a:pPr algn="ctr"/>
+            <a:r>
+              <a:rPr lang="zh-CN" altLang="en-US" sz="2400" i="1" dirty="0">
+                <a:solidFill>
+                  <a:schemeClr val="bg1"/>
+                </a:solidFill>
+              </a:rPr>
+              <a:t>这个课程告诉你可以从哪些角度去思考，但没有所有的答案</a:t>
+            </a:r>
+            <a:endParaRPr lang="en-US" sz="2400" i="1" dirty="0">
+              <a:solidFill>
+                <a:schemeClr val="bg1"/>
+              </a:solidFill>
+            </a:endParaRPr>
+          </a:p>
+        </p:txBody>
+      </p:sp>
     </p:spTree>
     <p:extLst>
       <p:ext uri="{BB962C8B-B14F-4D97-AF65-F5344CB8AC3E}">
@@ -47750,6 +46225,51 @@
                       </p:childTnLst>
                     </p:cTn>
                   </p:par>
+                  <p:par>
+                    <p:cTn id="15" fill="hold">
+                      <p:stCondLst>
+                        <p:cond delay="indefinite"/>
+                      </p:stCondLst>
+                      <p:childTnLst>
+                        <p:par>
+                          <p:cTn id="16" fill="hold">
+                            <p:stCondLst>
+                              <p:cond delay="0"/>
+                            </p:stCondLst>
+                            <p:childTnLst>
+                              <p:par>
+                                <p:cTn id="17" presetID="1" presetClass="entr" presetSubtype="0" fill="hold" grpId="0" nodeType="clickEffect">
+                                  <p:stCondLst>
+                                    <p:cond delay="0"/>
+                                  </p:stCondLst>
+                                  <p:childTnLst>
+                                    <p:set>
+                                      <p:cBhvr>
+                                        <p:cTn id="18" dur="1" fill="hold">
+                                          <p:stCondLst>
+                                            <p:cond delay="0"/>
+                                          </p:stCondLst>
+                                        </p:cTn>
+                                        <p:tgtEl>
+                                          <p:spTgt spid="4"/>
+                                        </p:tgtEl>
+                                        <p:attrNameLst>
+                                          <p:attrName>style.visibility</p:attrName>
+                                        </p:attrNameLst>
+                                      </p:cBhvr>
+                                      <p:to>
+                                        <p:strVal val="visible"/>
+                                      </p:to>
+                                    </p:set>
+                                  </p:childTnLst>
+                                </p:cTn>
+                              </p:par>
+                            </p:childTnLst>
+                          </p:cTn>
+                        </p:par>
+                      </p:childTnLst>
+                    </p:cTn>
+                  </p:par>
                 </p:childTnLst>
               </p:cTn>
               <p:prevCondLst>
@@ -47771,6 +46291,9 @@
         </p:cTn>
       </p:par>
     </p:tnLst>
+    <p:bldLst>
+      <p:bldP spid="4" grpId="0" animBg="1"/>
+    </p:bldLst>
   </p:timing>
 </p:sld>
 </file>
@@ -51746,6 +50269,23 @@
 </file>
 
 <file path=customXml/item1.xml><?xml version="1.0" encoding="utf-8"?>
+<?mso-contentType ?>
+<FormTemplates xmlns="http://schemas.microsoft.com/sharepoint/v3/contenttype/forms">
+  <Display>DocumentLibraryForm</Display>
+  <Edit>DocumentLibraryForm</Edit>
+  <New>DocumentLibraryForm</New>
+</FormTemplates>
+</file>
+
+<file path=customXml/item2.xml><?xml version="1.0" encoding="utf-8"?>
+<p:properties xmlns:p="http://schemas.microsoft.com/office/2006/metadata/properties" xmlns:xsi="http://www.w3.org/2001/XMLSchema-instance" xmlns:pc="http://schemas.microsoft.com/office/infopath/2007/PartnerControls">
+  <documentManagement>
+    <_activity xmlns="96e2f25c-537a-4a0c-91fb-0331a5612536" xsi:nil="true"/>
+  </documentManagement>
+</p:properties>
+</file>
+
+<file path=customXml/item3.xml><?xml version="1.0" encoding="utf-8"?>
 <ct:contentTypeSchema xmlns:ct="http://schemas.microsoft.com/office/2006/metadata/contentType" xmlns:ma="http://schemas.microsoft.com/office/2006/metadata/properties/metaAttributes" ct:_="" ma:_="" ma:contentTypeName="Document" ma:contentTypeID="0x0101007C40B1A4C5819246B9BFCCBA066F3ABE" ma:contentTypeVersion="19" ma:contentTypeDescription="Create a new document." ma:contentTypeScope="" ma:versionID="9692fad3877e1ae90f51e4baed900726">
   <xsd:schema xmlns:xsd="http://www.w3.org/2001/XMLSchema" xmlns:xs="http://www.w3.org/2001/XMLSchema" xmlns:p="http://schemas.microsoft.com/office/2006/metadata/properties" xmlns:ns3="96e2f25c-537a-4a0c-91fb-0331a5612536" xmlns:ns4="f66673be-3b20-4ac8-ba7c-00310aa8f626" targetNamespace="http://schemas.microsoft.com/office/2006/metadata/properties" ma:root="true" ma:fieldsID="a4d7b83b6d623c2308b23cc2086510ce" ns3:_="" ns4:_="">
     <xsd:import namespace="96e2f25c-537a-4a0c-91fb-0331a5612536"/>
@@ -52004,24 +50544,32 @@
 </ct:contentTypeSchema>
 </file>
 
-<file path=customXml/item2.xml><?xml version="1.0" encoding="utf-8"?>
-<?mso-contentType ?>
-<FormTemplates xmlns="http://schemas.microsoft.com/sharepoint/v3/contenttype/forms">
-  <Display>DocumentLibraryForm</Display>
-  <Edit>DocumentLibraryForm</Edit>
-  <New>DocumentLibraryForm</New>
-</FormTemplates>
+<file path=customXml/itemProps1.xml><?xml version="1.0" encoding="utf-8"?>
+<ds:datastoreItem xmlns:ds="http://schemas.openxmlformats.org/officeDocument/2006/customXml" ds:itemID="{C0A29639-2C97-4587-B7DD-B53C30F641B7}">
+  <ds:schemaRefs>
+    <ds:schemaRef ds:uri="http://schemas.microsoft.com/sharepoint/v3/contenttype/forms"/>
+  </ds:schemaRefs>
+</ds:datastoreItem>
 </file>
 
-<file path=customXml/item3.xml><?xml version="1.0" encoding="utf-8"?>
-<p:properties xmlns:p="http://schemas.microsoft.com/office/2006/metadata/properties" xmlns:xsi="http://www.w3.org/2001/XMLSchema-instance" xmlns:pc="http://schemas.microsoft.com/office/infopath/2007/PartnerControls">
-  <documentManagement>
-    <_activity xmlns="96e2f25c-537a-4a0c-91fb-0331a5612536" xsi:nil="true"/>
-  </documentManagement>
-</p:properties>
+<file path=customXml/itemProps2.xml><?xml version="1.0" encoding="utf-8"?>
+<ds:datastoreItem xmlns:ds="http://schemas.openxmlformats.org/officeDocument/2006/customXml" ds:itemID="{37FA058F-C745-49C3-B04F-664AB4EC0AC0}">
+  <ds:schemaRefs>
+    <ds:schemaRef ds:uri="http://www.w3.org/XML/1998/namespace"/>
+    <ds:schemaRef ds:uri="http://purl.org/dc/terms/"/>
+    <ds:schemaRef ds:uri="http://purl.org/dc/dcmitype/"/>
+    <ds:schemaRef ds:uri="http://schemas.microsoft.com/office/infopath/2007/PartnerControls"/>
+    <ds:schemaRef ds:uri="http://purl.org/dc/elements/1.1/"/>
+    <ds:schemaRef ds:uri="http://schemas.microsoft.com/office/2006/documentManagement/types"/>
+    <ds:schemaRef ds:uri="96e2f25c-537a-4a0c-91fb-0331a5612536"/>
+    <ds:schemaRef ds:uri="http://schemas.openxmlformats.org/package/2006/metadata/core-properties"/>
+    <ds:schemaRef ds:uri="f66673be-3b20-4ac8-ba7c-00310aa8f626"/>
+    <ds:schemaRef ds:uri="http://schemas.microsoft.com/office/2006/metadata/properties"/>
+  </ds:schemaRefs>
+</ds:datastoreItem>
 </file>
 
-<file path=customXml/itemProps1.xml><?xml version="1.0" encoding="utf-8"?>
+<file path=customXml/itemProps3.xml><?xml version="1.0" encoding="utf-8"?>
 <ds:datastoreItem xmlns:ds="http://schemas.openxmlformats.org/officeDocument/2006/customXml" ds:itemID="{AF88747F-F311-4A49-9509-54EE6A6EEAAB}">
   <ds:schemaRefs>
     <ds:schemaRef ds:uri="http://schemas.microsoft.com/office/2006/metadata/contentType"/>
@@ -52040,31 +50588,6 @@
 </ds:datastoreItem>
 </file>
 
-<file path=customXml/itemProps2.xml><?xml version="1.0" encoding="utf-8"?>
-<ds:datastoreItem xmlns:ds="http://schemas.openxmlformats.org/officeDocument/2006/customXml" ds:itemID="{C0A29639-2C97-4587-B7DD-B53C30F641B7}">
-  <ds:schemaRefs>
-    <ds:schemaRef ds:uri="http://schemas.microsoft.com/sharepoint/v3/contenttype/forms"/>
-  </ds:schemaRefs>
-</ds:datastoreItem>
-</file>
-
-<file path=customXml/itemProps3.xml><?xml version="1.0" encoding="utf-8"?>
-<ds:datastoreItem xmlns:ds="http://schemas.openxmlformats.org/officeDocument/2006/customXml" ds:itemID="{37FA058F-C745-49C3-B04F-664AB4EC0AC0}">
-  <ds:schemaRefs>
-    <ds:schemaRef ds:uri="http://www.w3.org/XML/1998/namespace"/>
-    <ds:schemaRef ds:uri="http://purl.org/dc/terms/"/>
-    <ds:schemaRef ds:uri="http://purl.org/dc/dcmitype/"/>
-    <ds:schemaRef ds:uri="http://schemas.microsoft.com/office/infopath/2007/PartnerControls"/>
-    <ds:schemaRef ds:uri="http://purl.org/dc/elements/1.1/"/>
-    <ds:schemaRef ds:uri="http://schemas.microsoft.com/office/2006/documentManagement/types"/>
-    <ds:schemaRef ds:uri="96e2f25c-537a-4a0c-91fb-0331a5612536"/>
-    <ds:schemaRef ds:uri="http://schemas.openxmlformats.org/package/2006/metadata/core-properties"/>
-    <ds:schemaRef ds:uri="f66673be-3b20-4ac8-ba7c-00310aa8f626"/>
-    <ds:schemaRef ds:uri="http://schemas.microsoft.com/office/2006/metadata/properties"/>
-  </ds:schemaRefs>
-</ds:datastoreItem>
-</file>
-
 <file path=docMetadata/LabelInfo.xml><?xml version="1.0" encoding="utf-8"?>
 <clbl:labelList xmlns:clbl="http://schemas.microsoft.com/office/2020/mipLabelMetadata">
   <clbl:label id="{46c98d88-e344-4ed4-8496-4ed7712e255d}" enabled="0" method="" siteId="{46c98d88-e344-4ed4-8496-4ed7712e255d}" removed="1"/>
